--- a/04.Langchain_Structured_output_21_March-2session/LangChain_Structured_Output_Part2A.pptx
+++ b/04.Langchain_Structured_output_21_March-2session/LangChain_Structured_Output_Part2A.pptx
@@ -81,19 +81,7 @@
               <a:rPr b="0" lang="en-IN" sz="4400" spc="-1" strike="noStrike">
                 <a:latin typeface="Arial"/>
               </a:rPr>
-              <a:t>Click to </a:t>
-            </a:r>
-            <a:r>
-              <a:rPr b="0" lang="en-IN" sz="4400" spc="-1" strike="noStrike">
-                <a:latin typeface="Arial"/>
-              </a:rPr>
-              <a:t>move </a:t>
-            </a:r>
-            <a:r>
-              <a:rPr b="0" lang="en-IN" sz="4400" spc="-1" strike="noStrike">
-                <a:latin typeface="Arial"/>
-              </a:rPr>
-              <a:t>the slide</a:t>
+              <a:t>Click to move the slide</a:t>
             </a:r>
             <a:endParaRPr b="0" lang="en-IN" sz="4400" spc="-1" strike="noStrike">
               <a:latin typeface="Arial"/>
@@ -133,13 +121,7 @@
               <a:rPr b="0" lang="en-IN" sz="2000" spc="-1" strike="noStrike">
                 <a:latin typeface="Arial"/>
               </a:rPr>
-              <a:t>Click to edit the </a:t>
-            </a:r>
-            <a:r>
-              <a:rPr b="0" lang="en-IN" sz="2000" spc="-1" strike="noStrike">
-                <a:latin typeface="Arial"/>
-              </a:rPr>
-              <a:t>notes format</a:t>
+              <a:t>Click to edit the notes format</a:t>
             </a:r>
             <a:endParaRPr b="0" lang="en-IN" sz="2000" spc="-1" strike="noStrike">
               <a:latin typeface="Arial"/>
@@ -324,7 +306,7 @@
             <a:pPr algn="r">
               <a:buNone/>
             </a:pPr>
-            <a:fld id="{DB7B614F-AA9C-4D34-98CB-7FA994D4E66C}" type="slidenum">
+            <a:fld id="{EB5F77C3-D378-42CB-A0CF-E57A4FBFB031}" type="slidenum">
               <a:rPr b="0" lang="en-IN" sz="1400" spc="-1" strike="noStrike">
                 <a:latin typeface="Times New Roman"/>
               </a:rPr>
@@ -372,7 +354,7 @@
         <p:spPr>
           <a:xfrm>
             <a:off x="685800" y="1143000"/>
-            <a:ext cx="5485680" cy="3085560"/>
+            <a:ext cx="5485320" cy="3085200"/>
           </a:xfrm>
           <a:prstGeom prst="rect">
             <a:avLst/>
@@ -395,7 +377,7 @@
         <p:spPr>
           <a:xfrm>
             <a:off x="685800" y="4400640"/>
-            <a:ext cx="5485680" cy="3599640"/>
+            <a:ext cx="5485320" cy="3599280"/>
           </a:xfrm>
           <a:prstGeom prst="rect">
             <a:avLst/>
@@ -429,7 +411,7 @@
         <p:spPr>
           <a:xfrm>
             <a:off x="3884760" y="8685360"/>
-            <a:ext cx="2971080" cy="457920"/>
+            <a:ext cx="2970720" cy="457560"/>
           </a:xfrm>
           <a:prstGeom prst="rect">
             <a:avLst/>
@@ -465,7 +447,7 @@
               </a:lnSpc>
               <a:buNone/>
             </a:pPr>
-            <a:fld id="{B633122E-DF7D-4ACF-B60F-F948988C8119}" type="slidenum">
+            <a:fld id="{BEA164E4-A077-43A6-923D-25A6D5EFC139}" type="slidenum">
               <a:rPr b="0" lang="en-US" sz="1200" spc="-1" strike="noStrike">
                 <a:solidFill>
                   <a:srgbClr val="000000"/>
@@ -516,7 +498,7 @@
         <p:spPr>
           <a:xfrm>
             <a:off x="685800" y="1143000"/>
-            <a:ext cx="5485680" cy="3085560"/>
+            <a:ext cx="5485320" cy="3085200"/>
           </a:xfrm>
           <a:prstGeom prst="rect">
             <a:avLst/>
@@ -539,7 +521,7 @@
         <p:spPr>
           <a:xfrm>
             <a:off x="685800" y="4400640"/>
-            <a:ext cx="5485680" cy="3599640"/>
+            <a:ext cx="5485320" cy="3599280"/>
           </a:xfrm>
           <a:prstGeom prst="rect">
             <a:avLst/>
@@ -573,7 +555,7 @@
         <p:spPr>
           <a:xfrm>
             <a:off x="3884760" y="8685360"/>
-            <a:ext cx="2971080" cy="457920"/>
+            <a:ext cx="2970720" cy="457560"/>
           </a:xfrm>
           <a:prstGeom prst="rect">
             <a:avLst/>
@@ -609,7 +591,7 @@
               </a:lnSpc>
               <a:buNone/>
             </a:pPr>
-            <a:fld id="{1B9F978B-E1E9-424D-8737-604FD30C999C}" type="slidenum">
+            <a:fld id="{244BB94F-394D-4815-B96D-99350DEA376F}" type="slidenum">
               <a:rPr b="0" lang="en-US" sz="1200" spc="-1" strike="noStrike">
                 <a:solidFill>
                   <a:srgbClr val="000000"/>
@@ -660,7 +642,7 @@
         <p:spPr>
           <a:xfrm>
             <a:off x="685800" y="1143000"/>
-            <a:ext cx="5485680" cy="3085560"/>
+            <a:ext cx="5485320" cy="3085200"/>
           </a:xfrm>
           <a:prstGeom prst="rect">
             <a:avLst/>
@@ -683,7 +665,7 @@
         <p:spPr>
           <a:xfrm>
             <a:off x="685800" y="4400640"/>
-            <a:ext cx="5485680" cy="3599640"/>
+            <a:ext cx="5485320" cy="3599280"/>
           </a:xfrm>
           <a:prstGeom prst="rect">
             <a:avLst/>
@@ -717,7 +699,7 @@
         <p:spPr>
           <a:xfrm>
             <a:off x="3884760" y="8685360"/>
-            <a:ext cx="2971080" cy="457920"/>
+            <a:ext cx="2970720" cy="457560"/>
           </a:xfrm>
           <a:prstGeom prst="rect">
             <a:avLst/>
@@ -753,7 +735,7 @@
               </a:lnSpc>
               <a:buNone/>
             </a:pPr>
-            <a:fld id="{57E91990-E3EA-4517-B2D7-BDF98EDDB2C5}" type="slidenum">
+            <a:fld id="{F12AFC37-A55D-4ED2-A68D-A267BA135ABF}" type="slidenum">
               <a:rPr b="0" lang="en-US" sz="1200" spc="-1" strike="noStrike">
                 <a:solidFill>
                   <a:srgbClr val="000000"/>
@@ -804,7 +786,7 @@
         <p:spPr>
           <a:xfrm>
             <a:off x="685800" y="1143000"/>
-            <a:ext cx="5485680" cy="3085560"/>
+            <a:ext cx="5485320" cy="3085200"/>
           </a:xfrm>
           <a:prstGeom prst="rect">
             <a:avLst/>
@@ -827,7 +809,7 @@
         <p:spPr>
           <a:xfrm>
             <a:off x="685800" y="4400640"/>
-            <a:ext cx="5485680" cy="3599640"/>
+            <a:ext cx="5485320" cy="3599280"/>
           </a:xfrm>
           <a:prstGeom prst="rect">
             <a:avLst/>
@@ -861,7 +843,7 @@
         <p:spPr>
           <a:xfrm>
             <a:off x="3884760" y="8685360"/>
-            <a:ext cx="2971080" cy="457920"/>
+            <a:ext cx="2970720" cy="457560"/>
           </a:xfrm>
           <a:prstGeom prst="rect">
             <a:avLst/>
@@ -897,7 +879,7 @@
               </a:lnSpc>
               <a:buNone/>
             </a:pPr>
-            <a:fld id="{9DCFB594-819A-408E-A908-E511423E6DB8}" type="slidenum">
+            <a:fld id="{9A60F91E-427B-4754-8ED7-568FEA68BEAD}" type="slidenum">
               <a:rPr b="0" lang="en-US" sz="1200" spc="-1" strike="noStrike">
                 <a:solidFill>
                   <a:srgbClr val="000000"/>
@@ -948,7 +930,7 @@
         <p:spPr>
           <a:xfrm>
             <a:off x="685800" y="1143000"/>
-            <a:ext cx="5485680" cy="3085560"/>
+            <a:ext cx="5485320" cy="3085200"/>
           </a:xfrm>
           <a:prstGeom prst="rect">
             <a:avLst/>
@@ -971,7 +953,7 @@
         <p:spPr>
           <a:xfrm>
             <a:off x="685800" y="4400640"/>
-            <a:ext cx="5485680" cy="3599640"/>
+            <a:ext cx="5485320" cy="3599280"/>
           </a:xfrm>
           <a:prstGeom prst="rect">
             <a:avLst/>
@@ -1005,7 +987,7 @@
         <p:spPr>
           <a:xfrm>
             <a:off x="3884760" y="8685360"/>
-            <a:ext cx="2971080" cy="457920"/>
+            <a:ext cx="2970720" cy="457560"/>
           </a:xfrm>
           <a:prstGeom prst="rect">
             <a:avLst/>
@@ -1041,7 +1023,7 @@
               </a:lnSpc>
               <a:buNone/>
             </a:pPr>
-            <a:fld id="{771EFC68-01AF-4206-982A-B67B629C3264}" type="slidenum">
+            <a:fld id="{7A524477-801F-4667-B54B-3FF3BCFF333D}" type="slidenum">
               <a:rPr b="0" lang="en-US" sz="1200" spc="-1" strike="noStrike">
                 <a:solidFill>
                   <a:srgbClr val="000000"/>
@@ -1092,7 +1074,7 @@
         <p:spPr>
           <a:xfrm>
             <a:off x="685800" y="1143000"/>
-            <a:ext cx="5485680" cy="3085560"/>
+            <a:ext cx="5485320" cy="3085200"/>
           </a:xfrm>
           <a:prstGeom prst="rect">
             <a:avLst/>
@@ -1115,7 +1097,7 @@
         <p:spPr>
           <a:xfrm>
             <a:off x="685800" y="4400640"/>
-            <a:ext cx="5485680" cy="3599640"/>
+            <a:ext cx="5485320" cy="3599280"/>
           </a:xfrm>
           <a:prstGeom prst="rect">
             <a:avLst/>
@@ -1149,7 +1131,7 @@
         <p:spPr>
           <a:xfrm>
             <a:off x="3884760" y="8685360"/>
-            <a:ext cx="2971080" cy="457920"/>
+            <a:ext cx="2970720" cy="457560"/>
           </a:xfrm>
           <a:prstGeom prst="rect">
             <a:avLst/>
@@ -1185,7 +1167,7 @@
               </a:lnSpc>
               <a:buNone/>
             </a:pPr>
-            <a:fld id="{AF1A41D3-611E-4B93-BFB7-2A72516B9982}" type="slidenum">
+            <a:fld id="{89DD8F2E-08D5-4978-9CD9-1DB21B6E6981}" type="slidenum">
               <a:rPr b="0" lang="en-US" sz="1200" spc="-1" strike="noStrike">
                 <a:solidFill>
                   <a:srgbClr val="000000"/>
@@ -1236,7 +1218,7 @@
         <p:spPr>
           <a:xfrm>
             <a:off x="685800" y="1143000"/>
-            <a:ext cx="5485680" cy="3085560"/>
+            <a:ext cx="5485320" cy="3085200"/>
           </a:xfrm>
           <a:prstGeom prst="rect">
             <a:avLst/>
@@ -1259,7 +1241,7 @@
         <p:spPr>
           <a:xfrm>
             <a:off x="685800" y="4400640"/>
-            <a:ext cx="5485680" cy="3599640"/>
+            <a:ext cx="5485320" cy="3599280"/>
           </a:xfrm>
           <a:prstGeom prst="rect">
             <a:avLst/>
@@ -1293,7 +1275,7 @@
         <p:spPr>
           <a:xfrm>
             <a:off x="3884760" y="8685360"/>
-            <a:ext cx="2971080" cy="457920"/>
+            <a:ext cx="2970720" cy="457560"/>
           </a:xfrm>
           <a:prstGeom prst="rect">
             <a:avLst/>
@@ -1329,7 +1311,7 @@
               </a:lnSpc>
               <a:buNone/>
             </a:pPr>
-            <a:fld id="{0DA84420-C5E3-4201-B917-420CFBDD4FB0}" type="slidenum">
+            <a:fld id="{809BB2FE-C2EE-481B-86CA-D2CFD95CA700}" type="slidenum">
               <a:rPr b="0" lang="en-US" sz="1200" spc="-1" strike="noStrike">
                 <a:solidFill>
                   <a:srgbClr val="000000"/>
@@ -1380,7 +1362,7 @@
         <p:spPr>
           <a:xfrm>
             <a:off x="685800" y="1143000"/>
-            <a:ext cx="5485680" cy="3085560"/>
+            <a:ext cx="5485320" cy="3085200"/>
           </a:xfrm>
           <a:prstGeom prst="rect">
             <a:avLst/>
@@ -1403,7 +1385,7 @@
         <p:spPr>
           <a:xfrm>
             <a:off x="685800" y="4400640"/>
-            <a:ext cx="5485680" cy="3599640"/>
+            <a:ext cx="5485320" cy="3599280"/>
           </a:xfrm>
           <a:prstGeom prst="rect">
             <a:avLst/>
@@ -1437,7 +1419,7 @@
         <p:spPr>
           <a:xfrm>
             <a:off x="3884760" y="8685360"/>
-            <a:ext cx="2971080" cy="457920"/>
+            <a:ext cx="2970720" cy="457560"/>
           </a:xfrm>
           <a:prstGeom prst="rect">
             <a:avLst/>
@@ -1473,7 +1455,7 @@
               </a:lnSpc>
               <a:buNone/>
             </a:pPr>
-            <a:fld id="{2B386728-626C-43FB-B400-7A695F1CA8E7}" type="slidenum">
+            <a:fld id="{F6CF1C18-DD78-4C95-B99E-D8CF7E0B487D}" type="slidenum">
               <a:rPr b="0" lang="en-US" sz="1200" spc="-1" strike="noStrike">
                 <a:solidFill>
                   <a:srgbClr val="000000"/>
@@ -1524,7 +1506,7 @@
         <p:spPr>
           <a:xfrm>
             <a:off x="685800" y="1143000"/>
-            <a:ext cx="5485680" cy="3085560"/>
+            <a:ext cx="5485320" cy="3085200"/>
           </a:xfrm>
           <a:prstGeom prst="rect">
             <a:avLst/>
@@ -1547,7 +1529,7 @@
         <p:spPr>
           <a:xfrm>
             <a:off x="685800" y="4400640"/>
-            <a:ext cx="5485680" cy="3599640"/>
+            <a:ext cx="5485320" cy="3599280"/>
           </a:xfrm>
           <a:prstGeom prst="rect">
             <a:avLst/>
@@ -1581,7 +1563,7 @@
         <p:spPr>
           <a:xfrm>
             <a:off x="3884760" y="8685360"/>
-            <a:ext cx="2971080" cy="457920"/>
+            <a:ext cx="2970720" cy="457560"/>
           </a:xfrm>
           <a:prstGeom prst="rect">
             <a:avLst/>
@@ -1617,7 +1599,7 @@
               </a:lnSpc>
               <a:buNone/>
             </a:pPr>
-            <a:fld id="{5E89013F-E55D-4AC0-95F1-EC83CCE70EA1}" type="slidenum">
+            <a:fld id="{F6A96CB8-5E8D-45E2-9B08-E0061DE1F095}" type="slidenum">
               <a:rPr b="0" lang="en-US" sz="1200" spc="-1" strike="noStrike">
                 <a:solidFill>
                   <a:srgbClr val="000000"/>
@@ -1668,7 +1650,7 @@
         <p:spPr>
           <a:xfrm>
             <a:off x="685800" y="1143000"/>
-            <a:ext cx="5485680" cy="3085560"/>
+            <a:ext cx="5485320" cy="3085200"/>
           </a:xfrm>
           <a:prstGeom prst="rect">
             <a:avLst/>
@@ -1691,7 +1673,7 @@
         <p:spPr>
           <a:xfrm>
             <a:off x="685800" y="4400640"/>
-            <a:ext cx="5485680" cy="3599640"/>
+            <a:ext cx="5485320" cy="3599280"/>
           </a:xfrm>
           <a:prstGeom prst="rect">
             <a:avLst/>
@@ -1725,7 +1707,7 @@
         <p:spPr>
           <a:xfrm>
             <a:off x="3884760" y="8685360"/>
-            <a:ext cx="2971080" cy="457920"/>
+            <a:ext cx="2970720" cy="457560"/>
           </a:xfrm>
           <a:prstGeom prst="rect">
             <a:avLst/>
@@ -1761,7 +1743,7 @@
               </a:lnSpc>
               <a:buNone/>
             </a:pPr>
-            <a:fld id="{416B6425-6217-423F-9D07-EA0CCB9D8455}" type="slidenum">
+            <a:fld id="{DB6D3788-00D5-42EE-853B-9A9D82D15576}" type="slidenum">
               <a:rPr b="0" lang="en-US" sz="1200" spc="-1" strike="noStrike">
                 <a:solidFill>
                   <a:srgbClr val="000000"/>
@@ -1812,7 +1794,7 @@
         <p:spPr>
           <a:xfrm>
             <a:off x="685800" y="1143000"/>
-            <a:ext cx="5485680" cy="3085560"/>
+            <a:ext cx="5485320" cy="3085200"/>
           </a:xfrm>
           <a:prstGeom prst="rect">
             <a:avLst/>
@@ -1835,7 +1817,7 @@
         <p:spPr>
           <a:xfrm>
             <a:off x="685800" y="4400640"/>
-            <a:ext cx="5485680" cy="3599640"/>
+            <a:ext cx="5485320" cy="3599280"/>
           </a:xfrm>
           <a:prstGeom prst="rect">
             <a:avLst/>
@@ -1869,7 +1851,7 @@
         <p:spPr>
           <a:xfrm>
             <a:off x="3884760" y="8685360"/>
-            <a:ext cx="2971080" cy="457920"/>
+            <a:ext cx="2970720" cy="457560"/>
           </a:xfrm>
           <a:prstGeom prst="rect">
             <a:avLst/>
@@ -1905,7 +1887,7 @@
               </a:lnSpc>
               <a:buNone/>
             </a:pPr>
-            <a:fld id="{64F113DF-A3B0-4AE4-AD53-C929993DF635}" type="slidenum">
+            <a:fld id="{EB73AE75-5DA1-4786-B29E-DD3E9DAA68A0}" type="slidenum">
               <a:rPr b="0" lang="en-US" sz="1200" spc="-1" strike="noStrike">
                 <a:solidFill>
                   <a:srgbClr val="000000"/>
@@ -1956,7 +1938,7 @@
         <p:spPr>
           <a:xfrm>
             <a:off x="685800" y="1143000"/>
-            <a:ext cx="5485680" cy="3085560"/>
+            <a:ext cx="5485320" cy="3085200"/>
           </a:xfrm>
           <a:prstGeom prst="rect">
             <a:avLst/>
@@ -1979,7 +1961,7 @@
         <p:spPr>
           <a:xfrm>
             <a:off x="685800" y="4400640"/>
-            <a:ext cx="5485680" cy="3599640"/>
+            <a:ext cx="5485320" cy="3599280"/>
           </a:xfrm>
           <a:prstGeom prst="rect">
             <a:avLst/>
@@ -2013,7 +1995,7 @@
         <p:spPr>
           <a:xfrm>
             <a:off x="3884760" y="8685360"/>
-            <a:ext cx="2971080" cy="457920"/>
+            <a:ext cx="2970720" cy="457560"/>
           </a:xfrm>
           <a:prstGeom prst="rect">
             <a:avLst/>
@@ -2049,7 +2031,7 @@
               </a:lnSpc>
               <a:buNone/>
             </a:pPr>
-            <a:fld id="{FA070908-6356-4C94-A554-9B9ED3967423}" type="slidenum">
+            <a:fld id="{21269EAD-8B24-417D-B6FF-46533F493125}" type="slidenum">
               <a:rPr b="0" lang="en-US" sz="1200" spc="-1" strike="noStrike">
                 <a:solidFill>
                   <a:srgbClr val="000000"/>
@@ -2100,7 +2082,7 @@
         <p:spPr>
           <a:xfrm>
             <a:off x="685800" y="1143000"/>
-            <a:ext cx="5485680" cy="3085560"/>
+            <a:ext cx="5485320" cy="3085200"/>
           </a:xfrm>
           <a:prstGeom prst="rect">
             <a:avLst/>
@@ -2123,7 +2105,7 @@
         <p:spPr>
           <a:xfrm>
             <a:off x="685800" y="4400640"/>
-            <a:ext cx="5485680" cy="3599640"/>
+            <a:ext cx="5485320" cy="3599280"/>
           </a:xfrm>
           <a:prstGeom prst="rect">
             <a:avLst/>
@@ -2157,7 +2139,7 @@
         <p:spPr>
           <a:xfrm>
             <a:off x="3884760" y="8685360"/>
-            <a:ext cx="2971080" cy="457920"/>
+            <a:ext cx="2970720" cy="457560"/>
           </a:xfrm>
           <a:prstGeom prst="rect">
             <a:avLst/>
@@ -2193,7 +2175,7 @@
               </a:lnSpc>
               <a:buNone/>
             </a:pPr>
-            <a:fld id="{1BA61F09-E749-4C22-A294-626BC7C70561}" type="slidenum">
+            <a:fld id="{2FF4078E-84B3-407D-B43A-34FF0263D5C2}" type="slidenum">
               <a:rPr b="0" lang="en-US" sz="1200" spc="-1" strike="noStrike">
                 <a:solidFill>
                   <a:srgbClr val="000000"/>
@@ -2244,7 +2226,7 @@
         <p:spPr>
           <a:xfrm>
             <a:off x="685800" y="1143000"/>
-            <a:ext cx="5485680" cy="3085560"/>
+            <a:ext cx="5485320" cy="3085200"/>
           </a:xfrm>
           <a:prstGeom prst="rect">
             <a:avLst/>
@@ -2267,7 +2249,7 @@
         <p:spPr>
           <a:xfrm>
             <a:off x="685800" y="4400640"/>
-            <a:ext cx="5485680" cy="3599640"/>
+            <a:ext cx="5485320" cy="3599280"/>
           </a:xfrm>
           <a:prstGeom prst="rect">
             <a:avLst/>
@@ -2301,7 +2283,7 @@
         <p:spPr>
           <a:xfrm>
             <a:off x="3884760" y="8685360"/>
-            <a:ext cx="2971080" cy="457920"/>
+            <a:ext cx="2970720" cy="457560"/>
           </a:xfrm>
           <a:prstGeom prst="rect">
             <a:avLst/>
@@ -2337,7 +2319,7 @@
               </a:lnSpc>
               <a:buNone/>
             </a:pPr>
-            <a:fld id="{3B47C8A7-1F06-4604-9EBB-B2BE79593A81}" type="slidenum">
+            <a:fld id="{0F60A8C6-0DD5-41EB-B47B-CF4F1B9C9C79}" type="slidenum">
               <a:rPr b="0" lang="en-US" sz="1200" spc="-1" strike="noStrike">
                 <a:solidFill>
                   <a:srgbClr val="000000"/>
@@ -2388,7 +2370,7 @@
         <p:spPr>
           <a:xfrm>
             <a:off x="685800" y="1143000"/>
-            <a:ext cx="5485680" cy="3085560"/>
+            <a:ext cx="5485320" cy="3085200"/>
           </a:xfrm>
           <a:prstGeom prst="rect">
             <a:avLst/>
@@ -2411,7 +2393,7 @@
         <p:spPr>
           <a:xfrm>
             <a:off x="685800" y="4400640"/>
-            <a:ext cx="5485680" cy="3599640"/>
+            <a:ext cx="5485320" cy="3599280"/>
           </a:xfrm>
           <a:prstGeom prst="rect">
             <a:avLst/>
@@ -2445,7 +2427,7 @@
         <p:spPr>
           <a:xfrm>
             <a:off x="3884760" y="8685360"/>
-            <a:ext cx="2971080" cy="457920"/>
+            <a:ext cx="2970720" cy="457560"/>
           </a:xfrm>
           <a:prstGeom prst="rect">
             <a:avLst/>
@@ -2481,7 +2463,7 @@
               </a:lnSpc>
               <a:buNone/>
             </a:pPr>
-            <a:fld id="{8B3DEAA6-D099-42C2-86C2-FA23684DA704}" type="slidenum">
+            <a:fld id="{C0F3DEEE-C8AD-4560-8A96-A59EC594C499}" type="slidenum">
               <a:rPr b="0" lang="en-US" sz="1200" spc="-1" strike="noStrike">
                 <a:solidFill>
                   <a:srgbClr val="000000"/>
@@ -4085,25 +4067,7 @@
               <a:rPr b="0" lang="en-IN" sz="4400" spc="-1" strike="noStrike">
                 <a:latin typeface="Arial"/>
               </a:rPr>
-              <a:t>Click to </a:t>
-            </a:r>
-            <a:r>
-              <a:rPr b="0" lang="en-IN" sz="4400" spc="-1" strike="noStrike">
-                <a:latin typeface="Arial"/>
-              </a:rPr>
-              <a:t>edit the </a:t>
-            </a:r>
-            <a:r>
-              <a:rPr b="0" lang="en-IN" sz="4400" spc="-1" strike="noStrike">
-                <a:latin typeface="Arial"/>
-              </a:rPr>
-              <a:t>title text </a:t>
-            </a:r>
-            <a:r>
-              <a:rPr b="0" lang="en-IN" sz="4400" spc="-1" strike="noStrike">
-                <a:latin typeface="Arial"/>
-              </a:rPr>
-              <a:t>format</a:t>
+              <a:t>Click to edit the title text format</a:t>
             </a:r>
             <a:endParaRPr b="0" lang="en-IN" sz="4400" spc="-1" strike="noStrike">
               <a:latin typeface="Arial"/>
@@ -4347,7 +4311,7 @@
         <p:spPr>
           <a:xfrm>
             <a:off x="0" y="0"/>
-            <a:ext cx="163800" cy="5142960"/>
+            <a:ext cx="163440" cy="5142600"/>
           </a:xfrm>
           <a:prstGeom prst="rect">
             <a:avLst/>
@@ -4375,7 +4339,7 @@
         <p:spPr>
           <a:xfrm>
             <a:off x="7132320" y="-1097280"/>
-            <a:ext cx="3474000" cy="3474000"/>
+            <a:ext cx="3473640" cy="3473640"/>
           </a:xfrm>
           <a:prstGeom prst="ellipse">
             <a:avLst/>
@@ -4403,7 +4367,7 @@
         <p:spPr>
           <a:xfrm>
             <a:off x="7498080" y="-822960"/>
-            <a:ext cx="2742480" cy="2742480"/>
+            <a:ext cx="2742120" cy="2742120"/>
           </a:xfrm>
           <a:prstGeom prst="ellipse">
             <a:avLst/>
@@ -4433,7 +4397,7 @@
         <p:spPr>
           <a:xfrm>
             <a:off x="0" y="4754880"/>
-            <a:ext cx="9143280" cy="383400"/>
+            <a:ext cx="9142920" cy="383040"/>
           </a:xfrm>
           <a:prstGeom prst="rect">
             <a:avLst/>
@@ -4461,7 +4425,7 @@
         <p:spPr>
           <a:xfrm>
             <a:off x="164520" y="4754880"/>
-            <a:ext cx="3199680" cy="383400"/>
+            <a:ext cx="3199320" cy="383040"/>
           </a:xfrm>
           <a:prstGeom prst="rect">
             <a:avLst/>
@@ -4493,7 +4457,7 @@
         <p:spPr>
           <a:xfrm>
             <a:off x="502920" y="1005840"/>
-            <a:ext cx="639360" cy="639360"/>
+            <a:ext cx="639000" cy="639000"/>
           </a:xfrm>
           <a:prstGeom prst="rect">
             <a:avLst/>
@@ -4512,7 +4476,7 @@
         <p:spPr>
           <a:xfrm>
             <a:off x="365760" y="1737360"/>
-            <a:ext cx="8411760" cy="822240"/>
+            <a:ext cx="8411400" cy="821880"/>
           </a:xfrm>
           <a:prstGeom prst="rect">
             <a:avLst/>
@@ -4567,7 +4531,7 @@
         <p:spPr>
           <a:xfrm>
             <a:off x="365760" y="2514600"/>
-            <a:ext cx="8411760" cy="685080"/>
+            <a:ext cx="8411400" cy="684720"/>
           </a:xfrm>
           <a:prstGeom prst="rect">
             <a:avLst/>
@@ -4622,7 +4586,7 @@
         <p:spPr>
           <a:xfrm>
             <a:off x="365760" y="3337560"/>
-            <a:ext cx="3474000" cy="401760"/>
+            <a:ext cx="3473640" cy="401400"/>
           </a:xfrm>
           <a:prstGeom prst="rect">
             <a:avLst/>
@@ -4650,7 +4614,7 @@
         <p:spPr>
           <a:xfrm>
             <a:off x="365760" y="3337560"/>
-            <a:ext cx="3474000" cy="401760"/>
+            <a:ext cx="3473640" cy="401400"/>
           </a:xfrm>
           <a:prstGeom prst="rect">
             <a:avLst/>
@@ -4705,7 +4669,7 @@
         <p:spPr>
           <a:xfrm>
             <a:off x="365760" y="4773240"/>
-            <a:ext cx="4571280" cy="346680"/>
+            <a:ext cx="4570920" cy="346320"/>
           </a:xfrm>
           <a:prstGeom prst="rect">
             <a:avLst/>
@@ -4797,7 +4761,7 @@
         <p:spPr>
           <a:xfrm>
             <a:off x="0" y="0"/>
-            <a:ext cx="9143280" cy="959400"/>
+            <a:ext cx="9142920" cy="959040"/>
           </a:xfrm>
           <a:prstGeom prst="rect">
             <a:avLst/>
@@ -4825,7 +4789,7 @@
         <p:spPr>
           <a:xfrm>
             <a:off x="0" y="960120"/>
-            <a:ext cx="9143280" cy="54000"/>
+            <a:ext cx="9142920" cy="53640"/>
           </a:xfrm>
           <a:prstGeom prst="rect">
             <a:avLst/>
@@ -4857,7 +4821,7 @@
         <p:spPr>
           <a:xfrm>
             <a:off x="320040" y="182880"/>
-            <a:ext cx="547920" cy="547920"/>
+            <a:ext cx="547560" cy="547560"/>
           </a:xfrm>
           <a:prstGeom prst="rect">
             <a:avLst/>
@@ -4876,7 +4840,7 @@
         <p:spPr>
           <a:xfrm>
             <a:off x="1005840" y="182880"/>
-            <a:ext cx="7771680" cy="593640"/>
+            <a:ext cx="7771320" cy="593280"/>
           </a:xfrm>
           <a:prstGeom prst="rect">
             <a:avLst/>
@@ -4931,7 +4895,7 @@
         <p:spPr>
           <a:xfrm>
             <a:off x="320040" y="1097280"/>
-            <a:ext cx="5028480" cy="2925360"/>
+            <a:ext cx="5028120" cy="2925000"/>
           </a:xfrm>
           <a:prstGeom prst="rect">
             <a:avLst/>
@@ -4966,7 +4930,7 @@
         <p:spPr>
           <a:xfrm>
             <a:off x="457200" y="1170360"/>
-            <a:ext cx="4754160" cy="255240"/>
+            <a:ext cx="4753800" cy="254880"/>
           </a:xfrm>
           <a:prstGeom prst="rect">
             <a:avLst/>
@@ -5021,7 +4985,7 @@
         <p:spPr>
           <a:xfrm>
             <a:off x="457200" y="1463040"/>
-            <a:ext cx="4754160" cy="2468160"/>
+            <a:ext cx="4753800" cy="2467800"/>
           </a:xfrm>
           <a:prstGeom prst="rect">
             <a:avLst/>
@@ -5398,7 +5362,7 @@
         <p:spPr>
           <a:xfrm>
             <a:off x="320040" y="4114800"/>
-            <a:ext cx="5028480" cy="867960"/>
+            <a:ext cx="5028120" cy="867600"/>
           </a:xfrm>
           <a:prstGeom prst="rect">
             <a:avLst/>
@@ -5426,7 +5390,7 @@
         <p:spPr>
           <a:xfrm>
             <a:off x="457200" y="4160520"/>
-            <a:ext cx="4571280" cy="227880"/>
+            <a:ext cx="4570920" cy="227520"/>
           </a:xfrm>
           <a:prstGeom prst="rect">
             <a:avLst/>
@@ -5481,7 +5445,7 @@
         <p:spPr>
           <a:xfrm>
             <a:off x="457200" y="4370760"/>
-            <a:ext cx="4662720" cy="547920"/>
+            <a:ext cx="4662360" cy="547560"/>
           </a:xfrm>
           <a:prstGeom prst="rect">
             <a:avLst/>
@@ -5560,7 +5524,7 @@
         <p:spPr>
           <a:xfrm>
             <a:off x="5532120" y="1097280"/>
-            <a:ext cx="3291120" cy="3885480"/>
+            <a:ext cx="3290760" cy="3885120"/>
           </a:xfrm>
           <a:prstGeom prst="rect">
             <a:avLst/>
@@ -5595,7 +5559,7 @@
         <p:spPr>
           <a:xfrm>
             <a:off x="5532120" y="1097280"/>
-            <a:ext cx="3291120" cy="438120"/>
+            <a:ext cx="3290760" cy="437760"/>
           </a:xfrm>
           <a:prstGeom prst="rect">
             <a:avLst/>
@@ -5623,7 +5587,7 @@
         <p:spPr>
           <a:xfrm>
             <a:off x="5669280" y="1152000"/>
-            <a:ext cx="3016800" cy="328320"/>
+            <a:ext cx="3016440" cy="327960"/>
           </a:xfrm>
           <a:prstGeom prst="rect">
             <a:avLst/>
@@ -5678,7 +5642,7 @@
         <p:spPr>
           <a:xfrm>
             <a:off x="5596200" y="1645920"/>
-            <a:ext cx="3135600" cy="547920"/>
+            <a:ext cx="3135240" cy="547560"/>
           </a:xfrm>
           <a:prstGeom prst="rect">
             <a:avLst/>
@@ -5706,7 +5670,7 @@
         <p:spPr>
           <a:xfrm>
             <a:off x="5596200" y="1645920"/>
-            <a:ext cx="54000" cy="547920"/>
+            <a:ext cx="53640" cy="547560"/>
           </a:xfrm>
           <a:prstGeom prst="rect">
             <a:avLst/>
@@ -5734,7 +5698,7 @@
         <p:spPr>
           <a:xfrm>
             <a:off x="5715000" y="1682640"/>
-            <a:ext cx="1096560" cy="218880"/>
+            <a:ext cx="1096200" cy="218520"/>
           </a:xfrm>
           <a:prstGeom prst="rect">
             <a:avLst/>
@@ -5789,7 +5753,7 @@
         <p:spPr>
           <a:xfrm>
             <a:off x="5715000" y="1883520"/>
-            <a:ext cx="2925360" cy="255240"/>
+            <a:ext cx="2925000" cy="254880"/>
           </a:xfrm>
           <a:prstGeom prst="rect">
             <a:avLst/>
@@ -5844,7 +5808,7 @@
         <p:spPr>
           <a:xfrm>
             <a:off x="5596200" y="2304360"/>
-            <a:ext cx="3135600" cy="547920"/>
+            <a:ext cx="3135240" cy="547560"/>
           </a:xfrm>
           <a:prstGeom prst="rect">
             <a:avLst/>
@@ -5872,7 +5836,7 @@
         <p:spPr>
           <a:xfrm>
             <a:off x="5596200" y="2304360"/>
-            <a:ext cx="54000" cy="547920"/>
+            <a:ext cx="53640" cy="547560"/>
           </a:xfrm>
           <a:prstGeom prst="rect">
             <a:avLst/>
@@ -5900,7 +5864,7 @@
         <p:spPr>
           <a:xfrm>
             <a:off x="5715000" y="2340720"/>
-            <a:ext cx="1096560" cy="218880"/>
+            <a:ext cx="1096200" cy="218520"/>
           </a:xfrm>
           <a:prstGeom prst="rect">
             <a:avLst/>
@@ -5955,7 +5919,7 @@
         <p:spPr>
           <a:xfrm>
             <a:off x="5715000" y="2541960"/>
-            <a:ext cx="2925360" cy="255240"/>
+            <a:ext cx="2925000" cy="254880"/>
           </a:xfrm>
           <a:prstGeom prst="rect">
             <a:avLst/>
@@ -6010,7 +5974,7 @@
         <p:spPr>
           <a:xfrm>
             <a:off x="5596200" y="2962800"/>
-            <a:ext cx="3135600" cy="547920"/>
+            <a:ext cx="3135240" cy="547560"/>
           </a:xfrm>
           <a:prstGeom prst="rect">
             <a:avLst/>
@@ -6038,7 +6002,7 @@
         <p:spPr>
           <a:xfrm>
             <a:off x="5596200" y="2962800"/>
-            <a:ext cx="54000" cy="547920"/>
+            <a:ext cx="53640" cy="547560"/>
           </a:xfrm>
           <a:prstGeom prst="rect">
             <a:avLst/>
@@ -6066,7 +6030,7 @@
         <p:spPr>
           <a:xfrm>
             <a:off x="5715000" y="2999160"/>
-            <a:ext cx="1096560" cy="218880"/>
+            <a:ext cx="1096200" cy="218520"/>
           </a:xfrm>
           <a:prstGeom prst="rect">
             <a:avLst/>
@@ -6121,7 +6085,7 @@
         <p:spPr>
           <a:xfrm>
             <a:off x="5715000" y="3200400"/>
-            <a:ext cx="2925360" cy="255240"/>
+            <a:ext cx="2925000" cy="254880"/>
           </a:xfrm>
           <a:prstGeom prst="rect">
             <a:avLst/>
@@ -6176,7 +6140,7 @@
         <p:spPr>
           <a:xfrm>
             <a:off x="5596200" y="3620880"/>
-            <a:ext cx="3135600" cy="547920"/>
+            <a:ext cx="3135240" cy="547560"/>
           </a:xfrm>
           <a:prstGeom prst="rect">
             <a:avLst/>
@@ -6204,7 +6168,7 @@
         <p:spPr>
           <a:xfrm>
             <a:off x="5596200" y="3620880"/>
-            <a:ext cx="54000" cy="547920"/>
+            <a:ext cx="53640" cy="547560"/>
           </a:xfrm>
           <a:prstGeom prst="rect">
             <a:avLst/>
@@ -6232,7 +6196,7 @@
         <p:spPr>
           <a:xfrm>
             <a:off x="5715000" y="3657600"/>
-            <a:ext cx="1096560" cy="218880"/>
+            <a:ext cx="1096200" cy="218520"/>
           </a:xfrm>
           <a:prstGeom prst="rect">
             <a:avLst/>
@@ -6287,7 +6251,7 @@
         <p:spPr>
           <a:xfrm>
             <a:off x="5715000" y="3858840"/>
-            <a:ext cx="2925360" cy="255240"/>
+            <a:ext cx="2925000" cy="254880"/>
           </a:xfrm>
           <a:prstGeom prst="rect">
             <a:avLst/>
@@ -6342,7 +6306,7 @@
         <p:spPr>
           <a:xfrm>
             <a:off x="5596200" y="4279320"/>
-            <a:ext cx="3135600" cy="547920"/>
+            <a:ext cx="3135240" cy="547560"/>
           </a:xfrm>
           <a:prstGeom prst="rect">
             <a:avLst/>
@@ -6370,7 +6334,7 @@
         <p:spPr>
           <a:xfrm>
             <a:off x="5596200" y="4279320"/>
-            <a:ext cx="54000" cy="547920"/>
+            <a:ext cx="53640" cy="547560"/>
           </a:xfrm>
           <a:prstGeom prst="rect">
             <a:avLst/>
@@ -6398,7 +6362,7 @@
         <p:spPr>
           <a:xfrm>
             <a:off x="5715000" y="4316040"/>
-            <a:ext cx="1096560" cy="218880"/>
+            <a:ext cx="1096200" cy="218520"/>
           </a:xfrm>
           <a:prstGeom prst="rect">
             <a:avLst/>
@@ -6453,7 +6417,7 @@
         <p:spPr>
           <a:xfrm>
             <a:off x="5715000" y="4517280"/>
-            <a:ext cx="2925360" cy="255240"/>
+            <a:ext cx="2925000" cy="254880"/>
           </a:xfrm>
           <a:prstGeom prst="rect">
             <a:avLst/>
@@ -6545,7 +6509,7 @@
         <p:spPr>
           <a:xfrm>
             <a:off x="0" y="0"/>
-            <a:ext cx="9143280" cy="959400"/>
+            <a:ext cx="9142920" cy="959040"/>
           </a:xfrm>
           <a:prstGeom prst="rect">
             <a:avLst/>
@@ -6573,7 +6537,7 @@
         <p:spPr>
           <a:xfrm>
             <a:off x="0" y="960120"/>
-            <a:ext cx="9143280" cy="54000"/>
+            <a:ext cx="9142920" cy="53640"/>
           </a:xfrm>
           <a:prstGeom prst="rect">
             <a:avLst/>
@@ -6605,7 +6569,7 @@
         <p:spPr>
           <a:xfrm>
             <a:off x="320040" y="182880"/>
-            <a:ext cx="547920" cy="547920"/>
+            <a:ext cx="547560" cy="547560"/>
           </a:xfrm>
           <a:prstGeom prst="rect">
             <a:avLst/>
@@ -6624,7 +6588,7 @@
         <p:spPr>
           <a:xfrm>
             <a:off x="1005840" y="182880"/>
-            <a:ext cx="7771680" cy="593640"/>
+            <a:ext cx="7771320" cy="593280"/>
           </a:xfrm>
           <a:prstGeom prst="rect">
             <a:avLst/>
@@ -6679,7 +6643,7 @@
         <p:spPr>
           <a:xfrm>
             <a:off x="320040" y="1097280"/>
-            <a:ext cx="5028480" cy="3108240"/>
+            <a:ext cx="5028120" cy="3107880"/>
           </a:xfrm>
           <a:prstGeom prst="rect">
             <a:avLst/>
@@ -6714,7 +6678,7 @@
         <p:spPr>
           <a:xfrm>
             <a:off x="457200" y="1170360"/>
-            <a:ext cx="4754160" cy="255240"/>
+            <a:ext cx="4753800" cy="254880"/>
           </a:xfrm>
           <a:prstGeom prst="rect">
             <a:avLst/>
@@ -6769,7 +6733,7 @@
         <p:spPr>
           <a:xfrm>
             <a:off x="457200" y="1444680"/>
-            <a:ext cx="4754160" cy="2651040"/>
+            <a:ext cx="4753800" cy="2650680"/>
           </a:xfrm>
           <a:prstGeom prst="rect">
             <a:avLst/>
@@ -7146,7 +7110,7 @@
         <p:spPr>
           <a:xfrm>
             <a:off x="320040" y="4297680"/>
-            <a:ext cx="5028480" cy="685080"/>
+            <a:ext cx="5028120" cy="684720"/>
           </a:xfrm>
           <a:prstGeom prst="rect">
             <a:avLst/>
@@ -7174,7 +7138,7 @@
         <p:spPr>
           <a:xfrm>
             <a:off x="457200" y="4343400"/>
-            <a:ext cx="4571280" cy="227880"/>
+            <a:ext cx="4570920" cy="227520"/>
           </a:xfrm>
           <a:prstGeom prst="rect">
             <a:avLst/>
@@ -7229,7 +7193,7 @@
         <p:spPr>
           <a:xfrm>
             <a:off x="457200" y="4553640"/>
-            <a:ext cx="4662720" cy="383400"/>
+            <a:ext cx="4662360" cy="383040"/>
           </a:xfrm>
           <a:prstGeom prst="rect">
             <a:avLst/>
@@ -7308,7 +7272,7 @@
         <p:spPr>
           <a:xfrm>
             <a:off x="5532120" y="1097280"/>
-            <a:ext cx="3291120" cy="2010960"/>
+            <a:ext cx="3290760" cy="2010600"/>
           </a:xfrm>
           <a:prstGeom prst="rect">
             <a:avLst/>
@@ -7343,7 +7307,7 @@
         <p:spPr>
           <a:xfrm>
             <a:off x="5532120" y="1097280"/>
-            <a:ext cx="3291120" cy="438120"/>
+            <a:ext cx="3290760" cy="437760"/>
           </a:xfrm>
           <a:prstGeom prst="rect">
             <a:avLst/>
@@ -7371,7 +7335,7 @@
         <p:spPr>
           <a:xfrm>
             <a:off x="5669280" y="1152000"/>
-            <a:ext cx="3016800" cy="328320"/>
+            <a:ext cx="3016440" cy="327960"/>
           </a:xfrm>
           <a:prstGeom prst="rect">
             <a:avLst/>
@@ -7436,7 +7400,7 @@
         <p:spPr>
           <a:xfrm>
             <a:off x="5669280" y="1645920"/>
-            <a:ext cx="3062520" cy="1325160"/>
+            <a:ext cx="3062160" cy="1324800"/>
           </a:xfrm>
           <a:prstGeom prst="rect">
             <a:avLst/>
@@ -7491,7 +7455,7 @@
         <p:spPr>
           <a:xfrm>
             <a:off x="5532120" y="3246120"/>
-            <a:ext cx="3291120" cy="1736640"/>
+            <a:ext cx="3290760" cy="1736280"/>
           </a:xfrm>
           <a:prstGeom prst="rect">
             <a:avLst/>
@@ -7526,7 +7490,7 @@
         <p:spPr>
           <a:xfrm>
             <a:off x="5532120" y="3246120"/>
-            <a:ext cx="3291120" cy="438120"/>
+            <a:ext cx="3290760" cy="437760"/>
           </a:xfrm>
           <a:prstGeom prst="rect">
             <a:avLst/>
@@ -7554,7 +7518,7 @@
         <p:spPr>
           <a:xfrm>
             <a:off x="5669280" y="3300840"/>
-            <a:ext cx="3016800" cy="328320"/>
+            <a:ext cx="3016440" cy="327960"/>
           </a:xfrm>
           <a:prstGeom prst="rect">
             <a:avLst/>
@@ -7619,7 +7583,7 @@
         <p:spPr>
           <a:xfrm>
             <a:off x="5669280" y="3794760"/>
-            <a:ext cx="3062520" cy="1050840"/>
+            <a:ext cx="3062160" cy="1050480"/>
           </a:xfrm>
           <a:prstGeom prst="rect">
             <a:avLst/>
@@ -7711,7 +7675,7 @@
         <p:spPr>
           <a:xfrm>
             <a:off x="0" y="0"/>
-            <a:ext cx="9143280" cy="5142960"/>
+            <a:ext cx="9142920" cy="5142600"/>
           </a:xfrm>
           <a:prstGeom prst="rect">
             <a:avLst/>
@@ -7739,7 +7703,7 @@
         <p:spPr>
           <a:xfrm>
             <a:off x="-1371600" y="-1371600"/>
-            <a:ext cx="4571280" cy="4571280"/>
+            <a:ext cx="4570920" cy="4570920"/>
           </a:xfrm>
           <a:prstGeom prst="ellipse">
             <a:avLst/>
@@ -7767,7 +7731,7 @@
         <p:spPr>
           <a:xfrm>
             <a:off x="5943600" y="2286000"/>
-            <a:ext cx="4114080" cy="4114080"/>
+            <a:ext cx="4113720" cy="4113720"/>
           </a:xfrm>
           <a:prstGeom prst="ellipse">
             <a:avLst/>
@@ -7795,7 +7759,7 @@
         <p:spPr>
           <a:xfrm>
             <a:off x="4023360" y="2103120"/>
-            <a:ext cx="1096560" cy="54000"/>
+            <a:ext cx="1096200" cy="53640"/>
           </a:xfrm>
           <a:prstGeom prst="rect">
             <a:avLst/>
@@ -7823,7 +7787,7 @@
         <p:spPr>
           <a:xfrm>
             <a:off x="4023360" y="1554480"/>
-            <a:ext cx="4571280" cy="410760"/>
+            <a:ext cx="4570920" cy="410400"/>
           </a:xfrm>
           <a:prstGeom prst="rect">
             <a:avLst/>
@@ -7854,7 +7818,7 @@
               </a:tabLst>
             </a:pPr>
             <a:r>
-              <a:rPr b="1" lang="en-US" sz="1300" spc="596" strike="noStrike">
+              <a:rPr b="1" lang="en-US" sz="1300" spc="593" strike="noStrike">
                 <a:solidFill>
                   <a:srgbClr val="48cae4"/>
                 </a:solidFill>
@@ -7878,7 +7842,7 @@
         <p:spPr>
           <a:xfrm>
             <a:off x="4023360" y="2194560"/>
-            <a:ext cx="4754160" cy="1096560"/>
+            <a:ext cx="4753800" cy="1096200"/>
           </a:xfrm>
           <a:prstGeom prst="rect">
             <a:avLst/>
@@ -7957,7 +7921,7 @@
         <p:spPr>
           <a:xfrm>
             <a:off x="4023360" y="3383280"/>
-            <a:ext cx="4754160" cy="822240"/>
+            <a:ext cx="4753800" cy="821880"/>
           </a:xfrm>
           <a:prstGeom prst="rect">
             <a:avLst/>
@@ -8016,7 +7980,7 @@
         <p:spPr>
           <a:xfrm>
             <a:off x="1005840" y="1463040"/>
-            <a:ext cx="1462320" cy="1462320"/>
+            <a:ext cx="1461960" cy="1461960"/>
           </a:xfrm>
           <a:prstGeom prst="rect">
             <a:avLst/>
@@ -8072,7 +8036,7 @@
         <p:spPr>
           <a:xfrm>
             <a:off x="0" y="0"/>
-            <a:ext cx="9143280" cy="959400"/>
+            <a:ext cx="9142920" cy="959040"/>
           </a:xfrm>
           <a:prstGeom prst="rect">
             <a:avLst/>
@@ -8100,7 +8064,7 @@
         <p:spPr>
           <a:xfrm>
             <a:off x="0" y="960120"/>
-            <a:ext cx="9143280" cy="54000"/>
+            <a:ext cx="9142920" cy="53640"/>
           </a:xfrm>
           <a:prstGeom prst="rect">
             <a:avLst/>
@@ -8132,7 +8096,7 @@
         <p:spPr>
           <a:xfrm>
             <a:off x="320040" y="182880"/>
-            <a:ext cx="547920" cy="547920"/>
+            <a:ext cx="547560" cy="547560"/>
           </a:xfrm>
           <a:prstGeom prst="rect">
             <a:avLst/>
@@ -8151,7 +8115,7 @@
         <p:spPr>
           <a:xfrm>
             <a:off x="1005840" y="182880"/>
-            <a:ext cx="7771680" cy="593640"/>
+            <a:ext cx="7771320" cy="593280"/>
           </a:xfrm>
           <a:prstGeom prst="rect">
             <a:avLst/>
@@ -8206,7 +8170,7 @@
         <p:spPr>
           <a:xfrm>
             <a:off x="320040" y="1152000"/>
-            <a:ext cx="8503200" cy="401760"/>
+            <a:ext cx="8502840" cy="401400"/>
           </a:xfrm>
           <a:prstGeom prst="rect">
             <a:avLst/>
@@ -8234,7 +8198,7 @@
         <p:spPr>
           <a:xfrm>
             <a:off x="457200" y="1188720"/>
-            <a:ext cx="8228880" cy="328320"/>
+            <a:ext cx="8228520" cy="327960"/>
           </a:xfrm>
           <a:prstGeom prst="rect">
             <a:avLst/>
@@ -8289,7 +8253,7 @@
         <p:spPr>
           <a:xfrm>
             <a:off x="320040" y="1691640"/>
-            <a:ext cx="4068360" cy="1005120"/>
+            <a:ext cx="4068000" cy="1004760"/>
           </a:xfrm>
           <a:prstGeom prst="rect">
             <a:avLst/>
@@ -8324,7 +8288,7 @@
         <p:spPr>
           <a:xfrm>
             <a:off x="320040" y="1691640"/>
-            <a:ext cx="4068360" cy="438120"/>
+            <a:ext cx="4068000" cy="437760"/>
           </a:xfrm>
           <a:prstGeom prst="rect">
             <a:avLst/>
@@ -8352,7 +8316,7 @@
         <p:spPr>
           <a:xfrm>
             <a:off x="457200" y="1737360"/>
-            <a:ext cx="3748320" cy="346680"/>
+            <a:ext cx="3747960" cy="346320"/>
           </a:xfrm>
           <a:prstGeom prst="rect">
             <a:avLst/>
@@ -8417,7 +8381,7 @@
         <p:spPr>
           <a:xfrm>
             <a:off x="457200" y="2194560"/>
-            <a:ext cx="3748320" cy="383400"/>
+            <a:ext cx="3747960" cy="383040"/>
           </a:xfrm>
           <a:prstGeom prst="rect">
             <a:avLst/>
@@ -8472,7 +8436,7 @@
         <p:spPr>
           <a:xfrm>
             <a:off x="4617720" y="1691640"/>
-            <a:ext cx="4068360" cy="1005120"/>
+            <a:ext cx="4068000" cy="1004760"/>
           </a:xfrm>
           <a:prstGeom prst="rect">
             <a:avLst/>
@@ -8507,7 +8471,7 @@
         <p:spPr>
           <a:xfrm>
             <a:off x="4617720" y="1691640"/>
-            <a:ext cx="4068360" cy="438120"/>
+            <a:ext cx="4068000" cy="437760"/>
           </a:xfrm>
           <a:prstGeom prst="rect">
             <a:avLst/>
@@ -8535,7 +8499,7 @@
         <p:spPr>
           <a:xfrm>
             <a:off x="4754880" y="1737360"/>
-            <a:ext cx="3748320" cy="346680"/>
+            <a:ext cx="3747960" cy="346320"/>
           </a:xfrm>
           <a:prstGeom prst="rect">
             <a:avLst/>
@@ -8600,7 +8564,7 @@
         <p:spPr>
           <a:xfrm>
             <a:off x="4754880" y="2194560"/>
-            <a:ext cx="3748320" cy="383400"/>
+            <a:ext cx="3747960" cy="383040"/>
           </a:xfrm>
           <a:prstGeom prst="rect">
             <a:avLst/>
@@ -8655,7 +8619,7 @@
         <p:spPr>
           <a:xfrm>
             <a:off x="320040" y="2834640"/>
-            <a:ext cx="3656880" cy="328320"/>
+            <a:ext cx="3656520" cy="327960"/>
           </a:xfrm>
           <a:prstGeom prst="rect">
             <a:avLst/>
@@ -8710,7 +8674,7 @@
         <p:spPr>
           <a:xfrm>
             <a:off x="320040" y="3246120"/>
-            <a:ext cx="273600" cy="273600"/>
+            <a:ext cx="273240" cy="273240"/>
           </a:xfrm>
           <a:prstGeom prst="ellipse">
             <a:avLst/>
@@ -8738,7 +8702,7 @@
         <p:spPr>
           <a:xfrm>
             <a:off x="320040" y="3246120"/>
-            <a:ext cx="273600" cy="273600"/>
+            <a:ext cx="273240" cy="273240"/>
           </a:xfrm>
           <a:prstGeom prst="rect">
             <a:avLst/>
@@ -8793,7 +8757,7 @@
         <p:spPr>
           <a:xfrm>
             <a:off x="685800" y="3246120"/>
-            <a:ext cx="3839760" cy="300960"/>
+            <a:ext cx="3839400" cy="300600"/>
           </a:xfrm>
           <a:prstGeom prst="rect">
             <a:avLst/>
@@ -8848,7 +8812,7 @@
         <p:spPr>
           <a:xfrm>
             <a:off x="320040" y="3684960"/>
-            <a:ext cx="273600" cy="273600"/>
+            <a:ext cx="273240" cy="273240"/>
           </a:xfrm>
           <a:prstGeom prst="ellipse">
             <a:avLst/>
@@ -8876,7 +8840,7 @@
         <p:spPr>
           <a:xfrm>
             <a:off x="320040" y="3684960"/>
-            <a:ext cx="273600" cy="273600"/>
+            <a:ext cx="273240" cy="273240"/>
           </a:xfrm>
           <a:prstGeom prst="rect">
             <a:avLst/>
@@ -8931,7 +8895,7 @@
         <p:spPr>
           <a:xfrm>
             <a:off x="685800" y="3684960"/>
-            <a:ext cx="3839760" cy="300960"/>
+            <a:ext cx="3839400" cy="300600"/>
           </a:xfrm>
           <a:prstGeom prst="rect">
             <a:avLst/>
@@ -8986,7 +8950,7 @@
         <p:spPr>
           <a:xfrm>
             <a:off x="320040" y="4123800"/>
-            <a:ext cx="273600" cy="273600"/>
+            <a:ext cx="273240" cy="273240"/>
           </a:xfrm>
           <a:prstGeom prst="ellipse">
             <a:avLst/>
@@ -9014,7 +8978,7 @@
         <p:spPr>
           <a:xfrm>
             <a:off x="320040" y="4123800"/>
-            <a:ext cx="273600" cy="273600"/>
+            <a:ext cx="273240" cy="273240"/>
           </a:xfrm>
           <a:prstGeom prst="rect">
             <a:avLst/>
@@ -9069,7 +9033,7 @@
         <p:spPr>
           <a:xfrm>
             <a:off x="685800" y="4123800"/>
-            <a:ext cx="3839760" cy="300960"/>
+            <a:ext cx="3839400" cy="300600"/>
           </a:xfrm>
           <a:prstGeom prst="rect">
             <a:avLst/>
@@ -9124,7 +9088,7 @@
         <p:spPr>
           <a:xfrm>
             <a:off x="320040" y="4563000"/>
-            <a:ext cx="273600" cy="273600"/>
+            <a:ext cx="273240" cy="273240"/>
           </a:xfrm>
           <a:prstGeom prst="ellipse">
             <a:avLst/>
@@ -9152,7 +9116,7 @@
         <p:spPr>
           <a:xfrm>
             <a:off x="320040" y="4563000"/>
-            <a:ext cx="273600" cy="273600"/>
+            <a:ext cx="273240" cy="273240"/>
           </a:xfrm>
           <a:prstGeom prst="rect">
             <a:avLst/>
@@ -9207,7 +9171,7 @@
         <p:spPr>
           <a:xfrm>
             <a:off x="685800" y="4563000"/>
-            <a:ext cx="3839760" cy="300960"/>
+            <a:ext cx="3839400" cy="300600"/>
           </a:xfrm>
           <a:prstGeom prst="rect">
             <a:avLst/>
@@ -9262,7 +9226,7 @@
         <p:spPr>
           <a:xfrm>
             <a:off x="4846320" y="2816280"/>
-            <a:ext cx="3976920" cy="2193840"/>
+            <a:ext cx="3976560" cy="2193480"/>
           </a:xfrm>
           <a:prstGeom prst="rect">
             <a:avLst/>
@@ -9297,7 +9261,7 @@
         <p:spPr>
           <a:xfrm>
             <a:off x="4983480" y="2889360"/>
-            <a:ext cx="3748320" cy="236880"/>
+            <a:ext cx="3747960" cy="236520"/>
           </a:xfrm>
           <a:prstGeom prst="rect">
             <a:avLst/>
@@ -9352,7 +9316,7 @@
         <p:spPr>
           <a:xfrm>
             <a:off x="4983480" y="3182040"/>
-            <a:ext cx="3748320" cy="1718280"/>
+            <a:ext cx="3747960" cy="1717920"/>
           </a:xfrm>
           <a:prstGeom prst="rect">
             <a:avLst/>
@@ -9608,7 +9572,7 @@
         <p:spPr>
           <a:xfrm>
             <a:off x="0" y="0"/>
-            <a:ext cx="9143280" cy="959400"/>
+            <a:ext cx="9142920" cy="959040"/>
           </a:xfrm>
           <a:prstGeom prst="rect">
             <a:avLst/>
@@ -9636,7 +9600,7 @@
         <p:spPr>
           <a:xfrm>
             <a:off x="0" y="960120"/>
-            <a:ext cx="9143280" cy="54000"/>
+            <a:ext cx="9142920" cy="53640"/>
           </a:xfrm>
           <a:prstGeom prst="rect">
             <a:avLst/>
@@ -9668,7 +9632,7 @@
         <p:spPr>
           <a:xfrm>
             <a:off x="320040" y="182880"/>
-            <a:ext cx="547920" cy="547920"/>
+            <a:ext cx="547560" cy="547560"/>
           </a:xfrm>
           <a:prstGeom prst="rect">
             <a:avLst/>
@@ -9687,7 +9651,7 @@
         <p:spPr>
           <a:xfrm>
             <a:off x="1005840" y="182880"/>
-            <a:ext cx="7771680" cy="593640"/>
+            <a:ext cx="7771320" cy="593280"/>
           </a:xfrm>
           <a:prstGeom prst="rect">
             <a:avLst/>
@@ -9742,7 +9706,7 @@
         <p:spPr>
           <a:xfrm>
             <a:off x="320040" y="1097280"/>
-            <a:ext cx="5165640" cy="3748320"/>
+            <a:ext cx="5165280" cy="3747960"/>
           </a:xfrm>
           <a:prstGeom prst="rect">
             <a:avLst/>
@@ -9777,7 +9741,7 @@
         <p:spPr>
           <a:xfrm>
             <a:off x="457200" y="1170360"/>
-            <a:ext cx="4845600" cy="255240"/>
+            <a:ext cx="4845240" cy="254880"/>
           </a:xfrm>
           <a:prstGeom prst="rect">
             <a:avLst/>
@@ -9832,7 +9796,7 @@
         <p:spPr>
           <a:xfrm>
             <a:off x="457200" y="1444680"/>
-            <a:ext cx="4937040" cy="3272760"/>
+            <a:ext cx="4936680" cy="3272400"/>
           </a:xfrm>
           <a:prstGeom prst="rect">
             <a:avLst/>
@@ -10347,7 +10311,7 @@
         <p:spPr>
           <a:xfrm>
             <a:off x="5623560" y="1097280"/>
-            <a:ext cx="3199680" cy="1462320"/>
+            <a:ext cx="3199320" cy="1461960"/>
           </a:xfrm>
           <a:prstGeom prst="rect">
             <a:avLst/>
@@ -10375,7 +10339,7 @@
         <p:spPr>
           <a:xfrm>
             <a:off x="5760720" y="1161360"/>
-            <a:ext cx="2925360" cy="236880"/>
+            <a:ext cx="2925000" cy="236520"/>
           </a:xfrm>
           <a:prstGeom prst="rect">
             <a:avLst/>
@@ -10430,7 +10394,7 @@
         <p:spPr>
           <a:xfrm>
             <a:off x="5760720" y="1389960"/>
-            <a:ext cx="2943720" cy="1096560"/>
+            <a:ext cx="2943360" cy="1096200"/>
           </a:xfrm>
           <a:prstGeom prst="rect">
             <a:avLst/>
@@ -10533,7 +10497,7 @@
         <p:spPr>
           <a:xfrm>
             <a:off x="5623560" y="2697480"/>
-            <a:ext cx="3199680" cy="1370880"/>
+            <a:ext cx="3199320" cy="1370520"/>
           </a:xfrm>
           <a:prstGeom prst="rect">
             <a:avLst/>
@@ -10561,7 +10525,7 @@
         <p:spPr>
           <a:xfrm>
             <a:off x="5760720" y="2761560"/>
-            <a:ext cx="2925360" cy="236880"/>
+            <a:ext cx="2925000" cy="236520"/>
           </a:xfrm>
           <a:prstGeom prst="rect">
             <a:avLst/>
@@ -10616,7 +10580,7 @@
         <p:spPr>
           <a:xfrm>
             <a:off x="5760720" y="3017520"/>
-            <a:ext cx="2943720" cy="959400"/>
+            <a:ext cx="2943360" cy="959040"/>
           </a:xfrm>
           <a:prstGeom prst="rect">
             <a:avLst/>
@@ -10781,7 +10745,7 @@
         <p:spPr>
           <a:xfrm>
             <a:off x="5623560" y="4178880"/>
-            <a:ext cx="3199680" cy="639360"/>
+            <a:ext cx="3199320" cy="639000"/>
           </a:xfrm>
           <a:prstGeom prst="rect">
             <a:avLst/>
@@ -10811,7 +10775,7 @@
         <p:spPr>
           <a:xfrm>
             <a:off x="5623560" y="4178880"/>
-            <a:ext cx="54000" cy="639360"/>
+            <a:ext cx="53640" cy="639000"/>
           </a:xfrm>
           <a:prstGeom prst="rect">
             <a:avLst/>
@@ -10839,7 +10803,7 @@
         <p:spPr>
           <a:xfrm>
             <a:off x="5733360" y="4224600"/>
-            <a:ext cx="3016800" cy="511200"/>
+            <a:ext cx="3016440" cy="510840"/>
           </a:xfrm>
           <a:prstGeom prst="rect">
             <a:avLst/>
@@ -10931,7 +10895,7 @@
         <p:spPr>
           <a:xfrm>
             <a:off x="0" y="0"/>
-            <a:ext cx="9143280" cy="959400"/>
+            <a:ext cx="9142920" cy="959040"/>
           </a:xfrm>
           <a:prstGeom prst="rect">
             <a:avLst/>
@@ -10959,7 +10923,7 @@
         <p:spPr>
           <a:xfrm>
             <a:off x="0" y="960120"/>
-            <a:ext cx="9143280" cy="54000"/>
+            <a:ext cx="9142920" cy="53640"/>
           </a:xfrm>
           <a:prstGeom prst="rect">
             <a:avLst/>
@@ -10991,7 +10955,7 @@
         <p:spPr>
           <a:xfrm>
             <a:off x="320040" y="182880"/>
-            <a:ext cx="547920" cy="547920"/>
+            <a:ext cx="547560" cy="547560"/>
           </a:xfrm>
           <a:prstGeom prst="rect">
             <a:avLst/>
@@ -11010,7 +10974,7 @@
         <p:spPr>
           <a:xfrm>
             <a:off x="1005840" y="182880"/>
-            <a:ext cx="7771680" cy="593640"/>
+            <a:ext cx="7771320" cy="593280"/>
           </a:xfrm>
           <a:prstGeom prst="rect">
             <a:avLst/>
@@ -11065,7 +11029,7 @@
         <p:spPr>
           <a:xfrm>
             <a:off x="320040" y="1115640"/>
-            <a:ext cx="2742480" cy="3565440"/>
+            <a:ext cx="2742120" cy="3565080"/>
           </a:xfrm>
           <a:prstGeom prst="rect">
             <a:avLst/>
@@ -11100,7 +11064,7 @@
         <p:spPr>
           <a:xfrm>
             <a:off x="320040" y="1115640"/>
-            <a:ext cx="2742480" cy="456480"/>
+            <a:ext cx="2742120" cy="456120"/>
           </a:xfrm>
           <a:prstGeom prst="rect">
             <a:avLst/>
@@ -11128,7 +11092,7 @@
         <p:spPr>
           <a:xfrm>
             <a:off x="457200" y="1170360"/>
-            <a:ext cx="2468160" cy="346680"/>
+            <a:ext cx="2467800" cy="346320"/>
           </a:xfrm>
           <a:prstGeom prst="rect">
             <a:avLst/>
@@ -11187,7 +11151,7 @@
         <p:spPr>
           <a:xfrm>
             <a:off x="457200" y="1691640"/>
-            <a:ext cx="236880" cy="236880"/>
+            <a:ext cx="236520" cy="236520"/>
           </a:xfrm>
           <a:prstGeom prst="rect">
             <a:avLst/>
@@ -11206,7 +11170,7 @@
         <p:spPr>
           <a:xfrm>
             <a:off x="777240" y="1673280"/>
-            <a:ext cx="2193840" cy="410760"/>
+            <a:ext cx="2193480" cy="410400"/>
           </a:xfrm>
           <a:prstGeom prst="rect">
             <a:avLst/>
@@ -11265,7 +11229,7 @@
         <p:spPr>
           <a:xfrm>
             <a:off x="457200" y="2331720"/>
-            <a:ext cx="236880" cy="236880"/>
+            <a:ext cx="236520" cy="236520"/>
           </a:xfrm>
           <a:prstGeom prst="rect">
             <a:avLst/>
@@ -11284,7 +11248,7 @@
         <p:spPr>
           <a:xfrm>
             <a:off x="777240" y="2313360"/>
-            <a:ext cx="2193840" cy="410760"/>
+            <a:ext cx="2193480" cy="410400"/>
           </a:xfrm>
           <a:prstGeom prst="rect">
             <a:avLst/>
@@ -11343,7 +11307,7 @@
         <p:spPr>
           <a:xfrm>
             <a:off x="457200" y="2971800"/>
-            <a:ext cx="236880" cy="236880"/>
+            <a:ext cx="236520" cy="236520"/>
           </a:xfrm>
           <a:prstGeom prst="rect">
             <a:avLst/>
@@ -11362,7 +11326,7 @@
         <p:spPr>
           <a:xfrm>
             <a:off x="777240" y="2953440"/>
-            <a:ext cx="2193840" cy="410760"/>
+            <a:ext cx="2193480" cy="410400"/>
           </a:xfrm>
           <a:prstGeom prst="rect">
             <a:avLst/>
@@ -11421,7 +11385,7 @@
         <p:spPr>
           <a:xfrm>
             <a:off x="457200" y="3611880"/>
-            <a:ext cx="236880" cy="236880"/>
+            <a:ext cx="236520" cy="236520"/>
           </a:xfrm>
           <a:prstGeom prst="rect">
             <a:avLst/>
@@ -11440,7 +11404,7 @@
         <p:spPr>
           <a:xfrm>
             <a:off x="777240" y="3593520"/>
-            <a:ext cx="2193840" cy="410760"/>
+            <a:ext cx="2193480" cy="410400"/>
           </a:xfrm>
           <a:prstGeom prst="rect">
             <a:avLst/>
@@ -11495,7 +11459,7 @@
         <p:spPr>
           <a:xfrm>
             <a:off x="3246120" y="1115640"/>
-            <a:ext cx="2742480" cy="3565440"/>
+            <a:ext cx="2742120" cy="3565080"/>
           </a:xfrm>
           <a:prstGeom prst="rect">
             <a:avLst/>
@@ -11530,7 +11494,7 @@
         <p:spPr>
           <a:xfrm>
             <a:off x="3246120" y="1115640"/>
-            <a:ext cx="2742480" cy="456480"/>
+            <a:ext cx="2742120" cy="456120"/>
           </a:xfrm>
           <a:prstGeom prst="rect">
             <a:avLst/>
@@ -11558,7 +11522,7 @@
         <p:spPr>
           <a:xfrm>
             <a:off x="3383280" y="1170360"/>
-            <a:ext cx="2468160" cy="346680"/>
+            <a:ext cx="2467800" cy="346320"/>
           </a:xfrm>
           <a:prstGeom prst="rect">
             <a:avLst/>
@@ -11617,7 +11581,7 @@
         <p:spPr>
           <a:xfrm>
             <a:off x="3383280" y="1691640"/>
-            <a:ext cx="236880" cy="236880"/>
+            <a:ext cx="236520" cy="236520"/>
           </a:xfrm>
           <a:prstGeom prst="rect">
             <a:avLst/>
@@ -11636,7 +11600,7 @@
         <p:spPr>
           <a:xfrm>
             <a:off x="3703320" y="1673280"/>
-            <a:ext cx="2193840" cy="410760"/>
+            <a:ext cx="2193480" cy="410400"/>
           </a:xfrm>
           <a:prstGeom prst="rect">
             <a:avLst/>
@@ -11695,7 +11659,7 @@
         <p:spPr>
           <a:xfrm>
             <a:off x="3383280" y="2331720"/>
-            <a:ext cx="236880" cy="236880"/>
+            <a:ext cx="236520" cy="236520"/>
           </a:xfrm>
           <a:prstGeom prst="rect">
             <a:avLst/>
@@ -11714,7 +11678,7 @@
         <p:spPr>
           <a:xfrm>
             <a:off x="3703320" y="2313360"/>
-            <a:ext cx="2193840" cy="410760"/>
+            <a:ext cx="2193480" cy="410400"/>
           </a:xfrm>
           <a:prstGeom prst="rect">
             <a:avLst/>
@@ -11773,7 +11737,7 @@
         <p:spPr>
           <a:xfrm>
             <a:off x="3383280" y="2971800"/>
-            <a:ext cx="236880" cy="236880"/>
+            <a:ext cx="236520" cy="236520"/>
           </a:xfrm>
           <a:prstGeom prst="rect">
             <a:avLst/>
@@ -11792,7 +11756,7 @@
         <p:spPr>
           <a:xfrm>
             <a:off x="3703320" y="2953440"/>
-            <a:ext cx="2193840" cy="410760"/>
+            <a:ext cx="2193480" cy="410400"/>
           </a:xfrm>
           <a:prstGeom prst="rect">
             <a:avLst/>
@@ -11851,7 +11815,7 @@
         <p:spPr>
           <a:xfrm>
             <a:off x="3383280" y="3611880"/>
-            <a:ext cx="236880" cy="236880"/>
+            <a:ext cx="236520" cy="236520"/>
           </a:xfrm>
           <a:prstGeom prst="rect">
             <a:avLst/>
@@ -11870,7 +11834,7 @@
         <p:spPr>
           <a:xfrm>
             <a:off x="3703320" y="3593520"/>
-            <a:ext cx="2193840" cy="410760"/>
+            <a:ext cx="2193480" cy="410400"/>
           </a:xfrm>
           <a:prstGeom prst="rect">
             <a:avLst/>
@@ -11925,7 +11889,7 @@
         <p:spPr>
           <a:xfrm>
             <a:off x="6172200" y="1115640"/>
-            <a:ext cx="2742480" cy="3565440"/>
+            <a:ext cx="2742120" cy="3565080"/>
           </a:xfrm>
           <a:prstGeom prst="rect">
             <a:avLst/>
@@ -11960,7 +11924,7 @@
         <p:spPr>
           <a:xfrm>
             <a:off x="6172200" y="1115640"/>
-            <a:ext cx="2742480" cy="456480"/>
+            <a:ext cx="2742120" cy="456120"/>
           </a:xfrm>
           <a:prstGeom prst="rect">
             <a:avLst/>
@@ -11988,7 +11952,7 @@
         <p:spPr>
           <a:xfrm>
             <a:off x="6309360" y="1170360"/>
-            <a:ext cx="2468160" cy="346680"/>
+            <a:ext cx="2467800" cy="346320"/>
           </a:xfrm>
           <a:prstGeom prst="rect">
             <a:avLst/>
@@ -12047,7 +12011,7 @@
         <p:spPr>
           <a:xfrm>
             <a:off x="6309360" y="1691640"/>
-            <a:ext cx="236880" cy="236880"/>
+            <a:ext cx="236520" cy="236520"/>
           </a:xfrm>
           <a:prstGeom prst="rect">
             <a:avLst/>
@@ -12066,7 +12030,7 @@
         <p:spPr>
           <a:xfrm>
             <a:off x="6629400" y="1673280"/>
-            <a:ext cx="2193840" cy="410760"/>
+            <a:ext cx="2193480" cy="410400"/>
           </a:xfrm>
           <a:prstGeom prst="rect">
             <a:avLst/>
@@ -12125,7 +12089,7 @@
         <p:spPr>
           <a:xfrm>
             <a:off x="6309360" y="2331720"/>
-            <a:ext cx="236880" cy="236880"/>
+            <a:ext cx="236520" cy="236520"/>
           </a:xfrm>
           <a:prstGeom prst="rect">
             <a:avLst/>
@@ -12144,7 +12108,7 @@
         <p:spPr>
           <a:xfrm>
             <a:off x="6629400" y="2313360"/>
-            <a:ext cx="2193840" cy="410760"/>
+            <a:ext cx="2193480" cy="410400"/>
           </a:xfrm>
           <a:prstGeom prst="rect">
             <a:avLst/>
@@ -12203,7 +12167,7 @@
         <p:spPr>
           <a:xfrm>
             <a:off x="6309360" y="2971800"/>
-            <a:ext cx="236880" cy="236880"/>
+            <a:ext cx="236520" cy="236520"/>
           </a:xfrm>
           <a:prstGeom prst="rect">
             <a:avLst/>
@@ -12222,7 +12186,7 @@
         <p:spPr>
           <a:xfrm>
             <a:off x="6629400" y="2953440"/>
-            <a:ext cx="2193840" cy="410760"/>
+            <a:ext cx="2193480" cy="410400"/>
           </a:xfrm>
           <a:prstGeom prst="rect">
             <a:avLst/>
@@ -12281,7 +12245,7 @@
         <p:spPr>
           <a:xfrm>
             <a:off x="6309360" y="3611880"/>
-            <a:ext cx="236880" cy="236880"/>
+            <a:ext cx="236520" cy="236520"/>
           </a:xfrm>
           <a:prstGeom prst="rect">
             <a:avLst/>
@@ -12300,7 +12264,7 @@
         <p:spPr>
           <a:xfrm>
             <a:off x="6629400" y="3593520"/>
-            <a:ext cx="2193840" cy="410760"/>
+            <a:ext cx="2193480" cy="410400"/>
           </a:xfrm>
           <a:prstGeom prst="rect">
             <a:avLst/>
@@ -12355,7 +12319,7 @@
         <p:spPr>
           <a:xfrm>
             <a:off x="320040" y="4773240"/>
-            <a:ext cx="8503200" cy="291960"/>
+            <a:ext cx="8502840" cy="291600"/>
           </a:xfrm>
           <a:prstGeom prst="rect">
             <a:avLst/>
@@ -12389,7 +12353,7 @@
         <p:spPr>
           <a:xfrm>
             <a:off x="402480" y="4818960"/>
-            <a:ext cx="200520" cy="200520"/>
+            <a:ext cx="200160" cy="200160"/>
           </a:xfrm>
           <a:prstGeom prst="rect">
             <a:avLst/>
@@ -12408,7 +12372,7 @@
         <p:spPr>
           <a:xfrm>
             <a:off x="658440" y="4818960"/>
-            <a:ext cx="8046000" cy="218880"/>
+            <a:ext cx="8045640" cy="218520"/>
           </a:xfrm>
           <a:prstGeom prst="rect">
             <a:avLst/>
@@ -12500,7 +12464,7 @@
         <p:spPr>
           <a:xfrm>
             <a:off x="0" y="0"/>
-            <a:ext cx="9143280" cy="959400"/>
+            <a:ext cx="9142920" cy="959040"/>
           </a:xfrm>
           <a:prstGeom prst="rect">
             <a:avLst/>
@@ -12528,7 +12492,7 @@
         <p:spPr>
           <a:xfrm>
             <a:off x="0" y="960120"/>
-            <a:ext cx="9143280" cy="54000"/>
+            <a:ext cx="9142920" cy="53640"/>
           </a:xfrm>
           <a:prstGeom prst="rect">
             <a:avLst/>
@@ -12560,7 +12524,7 @@
         <p:spPr>
           <a:xfrm>
             <a:off x="320040" y="182880"/>
-            <a:ext cx="547920" cy="547920"/>
+            <a:ext cx="547560" cy="547560"/>
           </a:xfrm>
           <a:prstGeom prst="rect">
             <a:avLst/>
@@ -12579,7 +12543,7 @@
         <p:spPr>
           <a:xfrm>
             <a:off x="1005840" y="182880"/>
-            <a:ext cx="7771680" cy="593640"/>
+            <a:ext cx="7771320" cy="593280"/>
           </a:xfrm>
           <a:prstGeom prst="rect">
             <a:avLst/>
@@ -12634,7 +12598,7 @@
         <p:spPr>
           <a:xfrm>
             <a:off x="320040" y="1152000"/>
-            <a:ext cx="8503200" cy="383400"/>
+            <a:ext cx="8502840" cy="383040"/>
           </a:xfrm>
           <a:prstGeom prst="rect">
             <a:avLst/>
@@ -12662,7 +12626,7 @@
         <p:spPr>
           <a:xfrm>
             <a:off x="457200" y="1188720"/>
-            <a:ext cx="8228880" cy="310320"/>
+            <a:ext cx="8228520" cy="309960"/>
           </a:xfrm>
           <a:prstGeom prst="rect">
             <a:avLst/>
@@ -12717,7 +12681,7 @@
         <p:spPr>
           <a:xfrm>
             <a:off x="320040" y="1664280"/>
-            <a:ext cx="3885480" cy="3108240"/>
+            <a:ext cx="3885120" cy="3107880"/>
           </a:xfrm>
           <a:prstGeom prst="rect">
             <a:avLst/>
@@ -12752,7 +12716,7 @@
         <p:spPr>
           <a:xfrm>
             <a:off x="320040" y="1664280"/>
-            <a:ext cx="3885480" cy="456480"/>
+            <a:ext cx="3885120" cy="456120"/>
           </a:xfrm>
           <a:prstGeom prst="rect">
             <a:avLst/>
@@ -12780,7 +12744,7 @@
         <p:spPr>
           <a:xfrm>
             <a:off x="457200" y="1710000"/>
-            <a:ext cx="3656880" cy="346680"/>
+            <a:ext cx="3656520" cy="346320"/>
           </a:xfrm>
           <a:prstGeom prst="rect">
             <a:avLst/>
@@ -12849,7 +12813,7 @@
         <p:spPr>
           <a:xfrm>
             <a:off x="411480" y="2231280"/>
-            <a:ext cx="236880" cy="236880"/>
+            <a:ext cx="236520" cy="236520"/>
           </a:xfrm>
           <a:prstGeom prst="rect">
             <a:avLst/>
@@ -12868,7 +12832,7 @@
         <p:spPr>
           <a:xfrm>
             <a:off x="749880" y="2203560"/>
-            <a:ext cx="3336840" cy="346680"/>
+            <a:ext cx="3336480" cy="346320"/>
           </a:xfrm>
           <a:prstGeom prst="rect">
             <a:avLst/>
@@ -12927,7 +12891,7 @@
         <p:spPr>
           <a:xfrm>
             <a:off x="411480" y="2816280"/>
-            <a:ext cx="236880" cy="236880"/>
+            <a:ext cx="236520" cy="236520"/>
           </a:xfrm>
           <a:prstGeom prst="rect">
             <a:avLst/>
@@ -12946,7 +12910,7 @@
         <p:spPr>
           <a:xfrm>
             <a:off x="749880" y="2788920"/>
-            <a:ext cx="3336840" cy="346680"/>
+            <a:ext cx="3336480" cy="346320"/>
           </a:xfrm>
           <a:prstGeom prst="rect">
             <a:avLst/>
@@ -13005,7 +12969,7 @@
         <p:spPr>
           <a:xfrm>
             <a:off x="411480" y="3401640"/>
-            <a:ext cx="236880" cy="236880"/>
+            <a:ext cx="236520" cy="236520"/>
           </a:xfrm>
           <a:prstGeom prst="rect">
             <a:avLst/>
@@ -13024,7 +12988,7 @@
         <p:spPr>
           <a:xfrm>
             <a:off x="749880" y="3374280"/>
-            <a:ext cx="3336840" cy="346680"/>
+            <a:ext cx="3336480" cy="346320"/>
           </a:xfrm>
           <a:prstGeom prst="rect">
             <a:avLst/>
@@ -13083,7 +13047,7 @@
         <p:spPr>
           <a:xfrm>
             <a:off x="411480" y="3986640"/>
-            <a:ext cx="236880" cy="236880"/>
+            <a:ext cx="236520" cy="236520"/>
           </a:xfrm>
           <a:prstGeom prst="rect">
             <a:avLst/>
@@ -13102,7 +13066,7 @@
         <p:spPr>
           <a:xfrm>
             <a:off x="749880" y="3959280"/>
-            <a:ext cx="3336840" cy="346680"/>
+            <a:ext cx="3336480" cy="346320"/>
           </a:xfrm>
           <a:prstGeom prst="rect">
             <a:avLst/>
@@ -13161,7 +13125,7 @@
         <p:spPr>
           <a:xfrm>
             <a:off x="4297680" y="2651760"/>
-            <a:ext cx="456480" cy="456480"/>
+            <a:ext cx="456120" cy="456120"/>
           </a:xfrm>
           <a:prstGeom prst="rect">
             <a:avLst/>
@@ -13180,7 +13144,7 @@
         <p:spPr>
           <a:xfrm>
             <a:off x="4892040" y="1664280"/>
-            <a:ext cx="3931200" cy="3108240"/>
+            <a:ext cx="3930840" cy="3107880"/>
           </a:xfrm>
           <a:prstGeom prst="rect">
             <a:avLst/>
@@ -13215,7 +13179,7 @@
         <p:spPr>
           <a:xfrm>
             <a:off x="4892040" y="1664280"/>
-            <a:ext cx="3931200" cy="456480"/>
+            <a:ext cx="3930840" cy="456120"/>
           </a:xfrm>
           <a:prstGeom prst="rect">
             <a:avLst/>
@@ -13243,7 +13207,7 @@
         <p:spPr>
           <a:xfrm>
             <a:off x="5029200" y="1710000"/>
-            <a:ext cx="3656880" cy="346680"/>
+            <a:ext cx="3656520" cy="346320"/>
           </a:xfrm>
           <a:prstGeom prst="rect">
             <a:avLst/>
@@ -13312,7 +13276,7 @@
         <p:spPr>
           <a:xfrm>
             <a:off x="4983480" y="2231280"/>
-            <a:ext cx="236880" cy="236880"/>
+            <a:ext cx="236520" cy="236520"/>
           </a:xfrm>
           <a:prstGeom prst="rect">
             <a:avLst/>
@@ -13331,7 +13295,7 @@
         <p:spPr>
           <a:xfrm>
             <a:off x="5321880" y="2203560"/>
-            <a:ext cx="3382560" cy="319320"/>
+            <a:ext cx="3382200" cy="318960"/>
           </a:xfrm>
           <a:prstGeom prst="rect">
             <a:avLst/>
@@ -13390,7 +13354,7 @@
         <p:spPr>
           <a:xfrm>
             <a:off x="4983480" y="2743200"/>
-            <a:ext cx="236880" cy="236880"/>
+            <a:ext cx="236520" cy="236520"/>
           </a:xfrm>
           <a:prstGeom prst="rect">
             <a:avLst/>
@@ -13409,7 +13373,7 @@
         <p:spPr>
           <a:xfrm>
             <a:off x="5321880" y="2715840"/>
-            <a:ext cx="3382560" cy="319320"/>
+            <a:ext cx="3382200" cy="318960"/>
           </a:xfrm>
           <a:prstGeom prst="rect">
             <a:avLst/>
@@ -13468,7 +13432,7 @@
         <p:spPr>
           <a:xfrm>
             <a:off x="4983480" y="3255120"/>
-            <a:ext cx="236880" cy="236880"/>
+            <a:ext cx="236520" cy="236520"/>
           </a:xfrm>
           <a:prstGeom prst="rect">
             <a:avLst/>
@@ -13487,7 +13451,7 @@
         <p:spPr>
           <a:xfrm>
             <a:off x="5321880" y="3227760"/>
-            <a:ext cx="3382560" cy="319320"/>
+            <a:ext cx="3382200" cy="318960"/>
           </a:xfrm>
           <a:prstGeom prst="rect">
             <a:avLst/>
@@ -13546,7 +13510,7 @@
         <p:spPr>
           <a:xfrm>
             <a:off x="4983480" y="3767400"/>
-            <a:ext cx="236880" cy="236880"/>
+            <a:ext cx="236520" cy="236520"/>
           </a:xfrm>
           <a:prstGeom prst="rect">
             <a:avLst/>
@@ -13565,7 +13529,7 @@
         <p:spPr>
           <a:xfrm>
             <a:off x="5321880" y="3740040"/>
-            <a:ext cx="3382560" cy="319320"/>
+            <a:ext cx="3382200" cy="318960"/>
           </a:xfrm>
           <a:prstGeom prst="rect">
             <a:avLst/>
@@ -13624,7 +13588,7 @@
         <p:spPr>
           <a:xfrm>
             <a:off x="4983480" y="4279320"/>
-            <a:ext cx="236880" cy="236880"/>
+            <a:ext cx="236520" cy="236520"/>
           </a:xfrm>
           <a:prstGeom prst="rect">
             <a:avLst/>
@@ -13643,7 +13607,7 @@
         <p:spPr>
           <a:xfrm>
             <a:off x="5321880" y="4251960"/>
-            <a:ext cx="3382560" cy="319320"/>
+            <a:ext cx="3382200" cy="318960"/>
           </a:xfrm>
           <a:prstGeom prst="rect">
             <a:avLst/>
@@ -13735,7 +13699,7 @@
         <p:spPr>
           <a:xfrm>
             <a:off x="0" y="0"/>
-            <a:ext cx="9143280" cy="5142960"/>
+            <a:ext cx="9142920" cy="5142600"/>
           </a:xfrm>
           <a:prstGeom prst="rect">
             <a:avLst/>
@@ -13763,7 +13727,7 @@
         <p:spPr>
           <a:xfrm>
             <a:off x="-1371600" y="-1371600"/>
-            <a:ext cx="4571280" cy="4571280"/>
+            <a:ext cx="4570920" cy="4570920"/>
           </a:xfrm>
           <a:prstGeom prst="ellipse">
             <a:avLst/>
@@ -13791,7 +13755,7 @@
         <p:spPr>
           <a:xfrm>
             <a:off x="5943600" y="2286000"/>
-            <a:ext cx="4114080" cy="4114080"/>
+            <a:ext cx="4113720" cy="4113720"/>
           </a:xfrm>
           <a:prstGeom prst="ellipse">
             <a:avLst/>
@@ -13819,7 +13783,7 @@
         <p:spPr>
           <a:xfrm>
             <a:off x="4023360" y="2103120"/>
-            <a:ext cx="1096560" cy="54000"/>
+            <a:ext cx="1096200" cy="53640"/>
           </a:xfrm>
           <a:prstGeom prst="rect">
             <a:avLst/>
@@ -13847,7 +13811,7 @@
         <p:spPr>
           <a:xfrm>
             <a:off x="4023360" y="1554480"/>
-            <a:ext cx="4571280" cy="410760"/>
+            <a:ext cx="4570920" cy="410400"/>
           </a:xfrm>
           <a:prstGeom prst="rect">
             <a:avLst/>
@@ -13878,7 +13842,7 @@
               </a:tabLst>
             </a:pPr>
             <a:r>
-              <a:rPr b="1" lang="en-US" sz="1300" spc="596" strike="noStrike">
+              <a:rPr b="1" lang="en-US" sz="1300" spc="593" strike="noStrike">
                 <a:solidFill>
                   <a:srgbClr val="48cae4"/>
                 </a:solidFill>
@@ -13902,7 +13866,7 @@
         <p:spPr>
           <a:xfrm>
             <a:off x="4023360" y="2194560"/>
-            <a:ext cx="4754160" cy="1096560"/>
+            <a:ext cx="4753800" cy="1096200"/>
           </a:xfrm>
           <a:prstGeom prst="rect">
             <a:avLst/>
@@ -13981,7 +13945,7 @@
         <p:spPr>
           <a:xfrm>
             <a:off x="4023360" y="3383280"/>
-            <a:ext cx="4754160" cy="822240"/>
+            <a:ext cx="4753800" cy="821880"/>
           </a:xfrm>
           <a:prstGeom prst="rect">
             <a:avLst/>
@@ -14040,7 +14004,7 @@
         <p:spPr>
           <a:xfrm>
             <a:off x="1005840" y="1463040"/>
-            <a:ext cx="1462320" cy="1462320"/>
+            <a:ext cx="1461960" cy="1461960"/>
           </a:xfrm>
           <a:prstGeom prst="rect">
             <a:avLst/>
@@ -14096,7 +14060,7 @@
         <p:spPr>
           <a:xfrm>
             <a:off x="0" y="0"/>
-            <a:ext cx="9143280" cy="959400"/>
+            <a:ext cx="9142920" cy="959040"/>
           </a:xfrm>
           <a:prstGeom prst="rect">
             <a:avLst/>
@@ -14124,7 +14088,7 @@
         <p:spPr>
           <a:xfrm>
             <a:off x="0" y="960120"/>
-            <a:ext cx="9143280" cy="54000"/>
+            <a:ext cx="9142920" cy="53640"/>
           </a:xfrm>
           <a:prstGeom prst="rect">
             <a:avLst/>
@@ -14156,7 +14120,7 @@
         <p:spPr>
           <a:xfrm>
             <a:off x="320040" y="182880"/>
-            <a:ext cx="547920" cy="547920"/>
+            <a:ext cx="547560" cy="547560"/>
           </a:xfrm>
           <a:prstGeom prst="rect">
             <a:avLst/>
@@ -14175,7 +14139,7 @@
         <p:spPr>
           <a:xfrm>
             <a:off x="1005840" y="182880"/>
-            <a:ext cx="7771680" cy="593640"/>
+            <a:ext cx="7771320" cy="593280"/>
           </a:xfrm>
           <a:prstGeom prst="rect">
             <a:avLst/>
@@ -14230,7 +14194,7 @@
         <p:spPr>
           <a:xfrm>
             <a:off x="320040" y="1188720"/>
-            <a:ext cx="3931200" cy="3519720"/>
+            <a:ext cx="3930840" cy="3519360"/>
           </a:xfrm>
           <a:prstGeom prst="rect">
             <a:avLst/>
@@ -14265,7 +14229,7 @@
         <p:spPr>
           <a:xfrm>
             <a:off x="320040" y="1188720"/>
-            <a:ext cx="3931200" cy="474840"/>
+            <a:ext cx="3930840" cy="474480"/>
           </a:xfrm>
           <a:prstGeom prst="rect">
             <a:avLst/>
@@ -14293,7 +14257,7 @@
         <p:spPr>
           <a:xfrm>
             <a:off x="457200" y="1243440"/>
-            <a:ext cx="3702600" cy="365040"/>
+            <a:ext cx="3702240" cy="364680"/>
           </a:xfrm>
           <a:prstGeom prst="rect">
             <a:avLst/>
@@ -14348,7 +14312,7 @@
         <p:spPr>
           <a:xfrm>
             <a:off x="457200" y="1801440"/>
-            <a:ext cx="959400" cy="273600"/>
+            <a:ext cx="959040" cy="273240"/>
           </a:xfrm>
           <a:prstGeom prst="rect">
             <a:avLst/>
@@ -14403,7 +14367,7 @@
         <p:spPr>
           <a:xfrm>
             <a:off x="457200" y="2030040"/>
-            <a:ext cx="3656880" cy="365040"/>
+            <a:ext cx="3656520" cy="364680"/>
           </a:xfrm>
           <a:prstGeom prst="rect">
             <a:avLst/>
@@ -14458,7 +14422,7 @@
         <p:spPr>
           <a:xfrm>
             <a:off x="457200" y="2423160"/>
-            <a:ext cx="3565440" cy="12960"/>
+            <a:ext cx="3565080" cy="12600"/>
           </a:xfrm>
           <a:prstGeom prst="rect">
             <a:avLst/>
@@ -14486,7 +14450,7 @@
         <p:spPr>
           <a:xfrm>
             <a:off x="457200" y="2496240"/>
-            <a:ext cx="959400" cy="273600"/>
+            <a:ext cx="959040" cy="273240"/>
           </a:xfrm>
           <a:prstGeom prst="rect">
             <a:avLst/>
@@ -14541,7 +14505,7 @@
         <p:spPr>
           <a:xfrm>
             <a:off x="457200" y="2724840"/>
-            <a:ext cx="3656880" cy="365040"/>
+            <a:ext cx="3656520" cy="364680"/>
           </a:xfrm>
           <a:prstGeom prst="rect">
             <a:avLst/>
@@ -14596,7 +14560,7 @@
         <p:spPr>
           <a:xfrm>
             <a:off x="457200" y="3117960"/>
-            <a:ext cx="3565440" cy="12960"/>
+            <a:ext cx="3565080" cy="12600"/>
           </a:xfrm>
           <a:prstGeom prst="rect">
             <a:avLst/>
@@ -14624,7 +14588,7 @@
         <p:spPr>
           <a:xfrm>
             <a:off x="457200" y="3191400"/>
-            <a:ext cx="959400" cy="273600"/>
+            <a:ext cx="959040" cy="273240"/>
           </a:xfrm>
           <a:prstGeom prst="rect">
             <a:avLst/>
@@ -14679,7 +14643,7 @@
         <p:spPr>
           <a:xfrm>
             <a:off x="457200" y="3420000"/>
-            <a:ext cx="3656880" cy="365040"/>
+            <a:ext cx="3656520" cy="364680"/>
           </a:xfrm>
           <a:prstGeom prst="rect">
             <a:avLst/>
@@ -14734,7 +14698,7 @@
         <p:spPr>
           <a:xfrm>
             <a:off x="457200" y="3813120"/>
-            <a:ext cx="3565440" cy="12960"/>
+            <a:ext cx="3565080" cy="12600"/>
           </a:xfrm>
           <a:prstGeom prst="rect">
             <a:avLst/>
@@ -14762,7 +14726,7 @@
         <p:spPr>
           <a:xfrm>
             <a:off x="457200" y="3886200"/>
-            <a:ext cx="959400" cy="273600"/>
+            <a:ext cx="959040" cy="273240"/>
           </a:xfrm>
           <a:prstGeom prst="rect">
             <a:avLst/>
@@ -14817,7 +14781,7 @@
         <p:spPr>
           <a:xfrm>
             <a:off x="457200" y="4114800"/>
-            <a:ext cx="3656880" cy="365040"/>
+            <a:ext cx="3656520" cy="364680"/>
           </a:xfrm>
           <a:prstGeom prst="rect">
             <a:avLst/>
@@ -14872,7 +14836,7 @@
         <p:spPr>
           <a:xfrm>
             <a:off x="457200" y="4434840"/>
-            <a:ext cx="3565440" cy="182160"/>
+            <a:ext cx="3565080" cy="181800"/>
           </a:xfrm>
           <a:prstGeom prst="rect">
             <a:avLst/>
@@ -14904,7 +14868,7 @@
         <p:spPr>
           <a:xfrm>
             <a:off x="502920" y="4425840"/>
-            <a:ext cx="182160" cy="182160"/>
+            <a:ext cx="181800" cy="181800"/>
           </a:xfrm>
           <a:prstGeom prst="rect">
             <a:avLst/>
@@ -14923,7 +14887,7 @@
         <p:spPr>
           <a:xfrm>
             <a:off x="749880" y="4425840"/>
-            <a:ext cx="3199680" cy="200520"/>
+            <a:ext cx="3199320" cy="200160"/>
           </a:xfrm>
           <a:prstGeom prst="rect">
             <a:avLst/>
@@ -14978,7 +14942,7 @@
         <p:spPr>
           <a:xfrm>
             <a:off x="4846320" y="1188720"/>
-            <a:ext cx="3931200" cy="3519720"/>
+            <a:ext cx="3930840" cy="3519360"/>
           </a:xfrm>
           <a:prstGeom prst="rect">
             <a:avLst/>
@@ -15013,7 +14977,7 @@
         <p:spPr>
           <a:xfrm>
             <a:off x="4846320" y="1188720"/>
-            <a:ext cx="3931200" cy="474840"/>
+            <a:ext cx="3930840" cy="474480"/>
           </a:xfrm>
           <a:prstGeom prst="rect">
             <a:avLst/>
@@ -15041,7 +15005,7 @@
         <p:spPr>
           <a:xfrm>
             <a:off x="4983480" y="1243440"/>
-            <a:ext cx="3702600" cy="365040"/>
+            <a:ext cx="3702240" cy="364680"/>
           </a:xfrm>
           <a:prstGeom prst="rect">
             <a:avLst/>
@@ -15096,7 +15060,7 @@
         <p:spPr>
           <a:xfrm>
             <a:off x="4983480" y="1801440"/>
-            <a:ext cx="959400" cy="273600"/>
+            <a:ext cx="959040" cy="273240"/>
           </a:xfrm>
           <a:prstGeom prst="rect">
             <a:avLst/>
@@ -15151,7 +15115,7 @@
         <p:spPr>
           <a:xfrm>
             <a:off x="4983480" y="2030040"/>
-            <a:ext cx="3656880" cy="365040"/>
+            <a:ext cx="3656520" cy="364680"/>
           </a:xfrm>
           <a:prstGeom prst="rect">
             <a:avLst/>
@@ -15206,7 +15170,7 @@
         <p:spPr>
           <a:xfrm>
             <a:off x="4983480" y="2423160"/>
-            <a:ext cx="3565440" cy="12960"/>
+            <a:ext cx="3565080" cy="12600"/>
           </a:xfrm>
           <a:prstGeom prst="rect">
             <a:avLst/>
@@ -15234,7 +15198,7 @@
         <p:spPr>
           <a:xfrm>
             <a:off x="4983480" y="2496240"/>
-            <a:ext cx="959400" cy="273600"/>
+            <a:ext cx="959040" cy="273240"/>
           </a:xfrm>
           <a:prstGeom prst="rect">
             <a:avLst/>
@@ -15289,7 +15253,7 @@
         <p:spPr>
           <a:xfrm>
             <a:off x="4983480" y="2724840"/>
-            <a:ext cx="3656880" cy="365040"/>
+            <a:ext cx="3656520" cy="364680"/>
           </a:xfrm>
           <a:prstGeom prst="rect">
             <a:avLst/>
@@ -15344,7 +15308,7 @@
         <p:spPr>
           <a:xfrm>
             <a:off x="4983480" y="3117960"/>
-            <a:ext cx="3565440" cy="12960"/>
+            <a:ext cx="3565080" cy="12600"/>
           </a:xfrm>
           <a:prstGeom prst="rect">
             <a:avLst/>
@@ -15372,7 +15336,7 @@
         <p:spPr>
           <a:xfrm>
             <a:off x="4983480" y="3191400"/>
-            <a:ext cx="959400" cy="273600"/>
+            <a:ext cx="959040" cy="273240"/>
           </a:xfrm>
           <a:prstGeom prst="rect">
             <a:avLst/>
@@ -15427,7 +15391,7 @@
         <p:spPr>
           <a:xfrm>
             <a:off x="4983480" y="3420000"/>
-            <a:ext cx="3656880" cy="365040"/>
+            <a:ext cx="3656520" cy="364680"/>
           </a:xfrm>
           <a:prstGeom prst="rect">
             <a:avLst/>
@@ -15482,7 +15446,7 @@
         <p:spPr>
           <a:xfrm>
             <a:off x="4983480" y="3813120"/>
-            <a:ext cx="3565440" cy="12960"/>
+            <a:ext cx="3565080" cy="12600"/>
           </a:xfrm>
           <a:prstGeom prst="rect">
             <a:avLst/>
@@ -15510,7 +15474,7 @@
         <p:spPr>
           <a:xfrm>
             <a:off x="4983480" y="3886200"/>
-            <a:ext cx="959400" cy="273600"/>
+            <a:ext cx="959040" cy="273240"/>
           </a:xfrm>
           <a:prstGeom prst="rect">
             <a:avLst/>
@@ -15565,7 +15529,7 @@
         <p:spPr>
           <a:xfrm>
             <a:off x="4983480" y="4114800"/>
-            <a:ext cx="3656880" cy="365040"/>
+            <a:ext cx="3656520" cy="364680"/>
           </a:xfrm>
           <a:prstGeom prst="rect">
             <a:avLst/>
@@ -15620,7 +15584,7 @@
         <p:spPr>
           <a:xfrm>
             <a:off x="320040" y="4800600"/>
-            <a:ext cx="8503200" cy="291960"/>
+            <a:ext cx="8502840" cy="291600"/>
           </a:xfrm>
           <a:prstGeom prst="rect">
             <a:avLst/>
@@ -15654,7 +15618,7 @@
         <p:spPr>
           <a:xfrm>
             <a:off x="384120" y="4827960"/>
-            <a:ext cx="200520" cy="200520"/>
+            <a:ext cx="200160" cy="200160"/>
           </a:xfrm>
           <a:prstGeom prst="rect">
             <a:avLst/>
@@ -15673,7 +15637,7 @@
         <p:spPr>
           <a:xfrm>
             <a:off x="658440" y="4827960"/>
-            <a:ext cx="8046000" cy="236880"/>
+            <a:ext cx="8045640" cy="236520"/>
           </a:xfrm>
           <a:prstGeom prst="rect">
             <a:avLst/>
@@ -15765,7 +15729,7 @@
         <p:spPr>
           <a:xfrm>
             <a:off x="0" y="0"/>
-            <a:ext cx="9143280" cy="959400"/>
+            <a:ext cx="9142920" cy="959040"/>
           </a:xfrm>
           <a:prstGeom prst="rect">
             <a:avLst/>
@@ -15793,7 +15757,7 @@
         <p:spPr>
           <a:xfrm>
             <a:off x="0" y="960120"/>
-            <a:ext cx="9143280" cy="54000"/>
+            <a:ext cx="9142920" cy="53640"/>
           </a:xfrm>
           <a:prstGeom prst="rect">
             <a:avLst/>
@@ -15825,7 +15789,7 @@
         <p:spPr>
           <a:xfrm>
             <a:off x="320040" y="182880"/>
-            <a:ext cx="547920" cy="547920"/>
+            <a:ext cx="547560" cy="547560"/>
           </a:xfrm>
           <a:prstGeom prst="rect">
             <a:avLst/>
@@ -15844,7 +15808,7 @@
         <p:spPr>
           <a:xfrm>
             <a:off x="1005840" y="182880"/>
-            <a:ext cx="7771680" cy="593640"/>
+            <a:ext cx="7771320" cy="593280"/>
           </a:xfrm>
           <a:prstGeom prst="rect">
             <a:avLst/>
@@ -15899,7 +15863,7 @@
         <p:spPr>
           <a:xfrm>
             <a:off x="320040" y="1115640"/>
-            <a:ext cx="4114080" cy="346680"/>
+            <a:ext cx="4113720" cy="346320"/>
           </a:xfrm>
           <a:prstGeom prst="rect">
             <a:avLst/>
@@ -15954,7 +15918,7 @@
         <p:spPr>
           <a:xfrm>
             <a:off x="320040" y="1536120"/>
-            <a:ext cx="310320" cy="310320"/>
+            <a:ext cx="309960" cy="309960"/>
           </a:xfrm>
           <a:prstGeom prst="ellipse">
             <a:avLst/>
@@ -15982,7 +15946,7 @@
         <p:spPr>
           <a:xfrm>
             <a:off x="320040" y="1536120"/>
-            <a:ext cx="310320" cy="310320"/>
+            <a:ext cx="309960" cy="309960"/>
           </a:xfrm>
           <a:prstGeom prst="rect">
             <a:avLst/>
@@ -16037,7 +16001,7 @@
         <p:spPr>
           <a:xfrm>
             <a:off x="731520" y="1536120"/>
-            <a:ext cx="3565440" cy="346680"/>
+            <a:ext cx="3565080" cy="346320"/>
           </a:xfrm>
           <a:prstGeom prst="rect">
             <a:avLst/>
@@ -16092,7 +16056,7 @@
         <p:spPr>
           <a:xfrm>
             <a:off x="320040" y="2030040"/>
-            <a:ext cx="310320" cy="310320"/>
+            <a:ext cx="309960" cy="309960"/>
           </a:xfrm>
           <a:prstGeom prst="ellipse">
             <a:avLst/>
@@ -16120,7 +16084,7 @@
         <p:spPr>
           <a:xfrm>
             <a:off x="320040" y="2030040"/>
-            <a:ext cx="310320" cy="310320"/>
+            <a:ext cx="309960" cy="309960"/>
           </a:xfrm>
           <a:prstGeom prst="rect">
             <a:avLst/>
@@ -16175,7 +16139,7 @@
         <p:spPr>
           <a:xfrm>
             <a:off x="731520" y="2030040"/>
-            <a:ext cx="3565440" cy="346680"/>
+            <a:ext cx="3565080" cy="346320"/>
           </a:xfrm>
           <a:prstGeom prst="rect">
             <a:avLst/>
@@ -16230,7 +16194,7 @@
         <p:spPr>
           <a:xfrm>
             <a:off x="320040" y="2523600"/>
-            <a:ext cx="310320" cy="310320"/>
+            <a:ext cx="309960" cy="309960"/>
           </a:xfrm>
           <a:prstGeom prst="ellipse">
             <a:avLst/>
@@ -16258,7 +16222,7 @@
         <p:spPr>
           <a:xfrm>
             <a:off x="320040" y="2523600"/>
-            <a:ext cx="310320" cy="310320"/>
+            <a:ext cx="309960" cy="309960"/>
           </a:xfrm>
           <a:prstGeom prst="rect">
             <a:avLst/>
@@ -16313,7 +16277,7 @@
         <p:spPr>
           <a:xfrm>
             <a:off x="731520" y="2523600"/>
-            <a:ext cx="3565440" cy="346680"/>
+            <a:ext cx="3565080" cy="346320"/>
           </a:xfrm>
           <a:prstGeom prst="rect">
             <a:avLst/>
@@ -16368,7 +16332,7 @@
         <p:spPr>
           <a:xfrm>
             <a:off x="320040" y="3017520"/>
-            <a:ext cx="310320" cy="310320"/>
+            <a:ext cx="309960" cy="309960"/>
           </a:xfrm>
           <a:prstGeom prst="ellipse">
             <a:avLst/>
@@ -16396,7 +16360,7 @@
         <p:spPr>
           <a:xfrm>
             <a:off x="320040" y="3017520"/>
-            <a:ext cx="310320" cy="310320"/>
+            <a:ext cx="309960" cy="309960"/>
           </a:xfrm>
           <a:prstGeom prst="rect">
             <a:avLst/>
@@ -16451,7 +16415,7 @@
         <p:spPr>
           <a:xfrm>
             <a:off x="731520" y="3017520"/>
-            <a:ext cx="3565440" cy="346680"/>
+            <a:ext cx="3565080" cy="346320"/>
           </a:xfrm>
           <a:prstGeom prst="rect">
             <a:avLst/>
@@ -16506,7 +16470,7 @@
         <p:spPr>
           <a:xfrm>
             <a:off x="4572000" y="1097280"/>
-            <a:ext cx="4251240" cy="1188000"/>
+            <a:ext cx="4250880" cy="1187640"/>
           </a:xfrm>
           <a:prstGeom prst="rect">
             <a:avLst/>
@@ -16541,7 +16505,7 @@
         <p:spPr>
           <a:xfrm>
             <a:off x="4681800" y="1170360"/>
-            <a:ext cx="3931200" cy="255240"/>
+            <a:ext cx="3930840" cy="254880"/>
           </a:xfrm>
           <a:prstGeom prst="rect">
             <a:avLst/>
@@ -16596,7 +16560,7 @@
         <p:spPr>
           <a:xfrm>
             <a:off x="4681800" y="1417320"/>
-            <a:ext cx="4022640" cy="776520"/>
+            <a:ext cx="4022280" cy="776160"/>
           </a:xfrm>
           <a:prstGeom prst="rect">
             <a:avLst/>
@@ -16675,7 +16639,7 @@
         <p:spPr>
           <a:xfrm>
             <a:off x="4572000" y="2423160"/>
-            <a:ext cx="4251240" cy="1508040"/>
+            <a:ext cx="4250880" cy="1507680"/>
           </a:xfrm>
           <a:prstGeom prst="rect">
             <a:avLst/>
@@ -16710,7 +16674,7 @@
         <p:spPr>
           <a:xfrm>
             <a:off x="4681800" y="2487240"/>
-            <a:ext cx="3931200" cy="255240"/>
+            <a:ext cx="3930840" cy="254880"/>
           </a:xfrm>
           <a:prstGeom prst="rect">
             <a:avLst/>
@@ -16765,7 +16729,7 @@
         <p:spPr>
           <a:xfrm>
             <a:off x="4681800" y="2724840"/>
-            <a:ext cx="4022640" cy="1114920"/>
+            <a:ext cx="4022280" cy="1114560"/>
           </a:xfrm>
           <a:prstGeom prst="rect">
             <a:avLst/>
@@ -16926,7 +16890,7 @@
         <p:spPr>
           <a:xfrm>
             <a:off x="4572000" y="4041720"/>
-            <a:ext cx="4251240" cy="685080"/>
+            <a:ext cx="4250880" cy="684720"/>
           </a:xfrm>
           <a:prstGeom prst="rect">
             <a:avLst/>
@@ -16956,7 +16920,7 @@
         <p:spPr>
           <a:xfrm>
             <a:off x="4572000" y="4041720"/>
-            <a:ext cx="54000" cy="685080"/>
+            <a:ext cx="53640" cy="684720"/>
           </a:xfrm>
           <a:prstGeom prst="rect">
             <a:avLst/>
@@ -16988,7 +16952,7 @@
         <p:spPr>
           <a:xfrm>
             <a:off x="4681800" y="4151520"/>
-            <a:ext cx="200520" cy="200520"/>
+            <a:ext cx="200160" cy="200160"/>
           </a:xfrm>
           <a:prstGeom prst="rect">
             <a:avLst/>
@@ -17007,7 +16971,7 @@
         <p:spPr>
           <a:xfrm>
             <a:off x="4937760" y="4114800"/>
-            <a:ext cx="3794040" cy="502200"/>
+            <a:ext cx="3793680" cy="501840"/>
           </a:xfrm>
           <a:prstGeom prst="rect">
             <a:avLst/>
@@ -17099,7 +17063,7 @@
         <p:spPr>
           <a:xfrm>
             <a:off x="0" y="0"/>
-            <a:ext cx="9143280" cy="5142960"/>
+            <a:ext cx="9142920" cy="5142600"/>
           </a:xfrm>
           <a:prstGeom prst="rect">
             <a:avLst/>
@@ -17127,7 +17091,7 @@
         <p:spPr>
           <a:xfrm>
             <a:off x="-1371600" y="-1371600"/>
-            <a:ext cx="4571280" cy="4571280"/>
+            <a:ext cx="4570920" cy="4570920"/>
           </a:xfrm>
           <a:prstGeom prst="ellipse">
             <a:avLst/>
@@ -17155,7 +17119,7 @@
         <p:spPr>
           <a:xfrm>
             <a:off x="5943600" y="2286000"/>
-            <a:ext cx="4114080" cy="4114080"/>
+            <a:ext cx="4113720" cy="4113720"/>
           </a:xfrm>
           <a:prstGeom prst="ellipse">
             <a:avLst/>
@@ -17183,7 +17147,7 @@
         <p:spPr>
           <a:xfrm>
             <a:off x="4023360" y="2103120"/>
-            <a:ext cx="1096560" cy="54000"/>
+            <a:ext cx="1096200" cy="53640"/>
           </a:xfrm>
           <a:prstGeom prst="rect">
             <a:avLst/>
@@ -17211,7 +17175,7 @@
         <p:spPr>
           <a:xfrm>
             <a:off x="4023360" y="1554480"/>
-            <a:ext cx="4571280" cy="410760"/>
+            <a:ext cx="4570920" cy="410400"/>
           </a:xfrm>
           <a:prstGeom prst="rect">
             <a:avLst/>
@@ -17242,7 +17206,7 @@
               </a:tabLst>
             </a:pPr>
             <a:r>
-              <a:rPr b="1" lang="en-US" sz="1300" spc="596" strike="noStrike">
+              <a:rPr b="1" lang="en-US" sz="1300" spc="593" strike="noStrike">
                 <a:solidFill>
                   <a:srgbClr val="48cae4"/>
                 </a:solidFill>
@@ -17266,7 +17230,7 @@
         <p:spPr>
           <a:xfrm>
             <a:off x="4023360" y="2194560"/>
-            <a:ext cx="4754160" cy="1096560"/>
+            <a:ext cx="4753800" cy="1096200"/>
           </a:xfrm>
           <a:prstGeom prst="rect">
             <a:avLst/>
@@ -17345,7 +17309,7 @@
         <p:spPr>
           <a:xfrm>
             <a:off x="4023360" y="3383280"/>
-            <a:ext cx="4754160" cy="822240"/>
+            <a:ext cx="4753800" cy="821880"/>
           </a:xfrm>
           <a:prstGeom prst="rect">
             <a:avLst/>
@@ -17404,7 +17368,7 @@
         <p:spPr>
           <a:xfrm>
             <a:off x="1005840" y="1463040"/>
-            <a:ext cx="1462320" cy="1462320"/>
+            <a:ext cx="1461960" cy="1461960"/>
           </a:xfrm>
           <a:prstGeom prst="rect">
             <a:avLst/>
@@ -17460,7 +17424,7 @@
         <p:spPr>
           <a:xfrm>
             <a:off x="0" y="0"/>
-            <a:ext cx="9143280" cy="959400"/>
+            <a:ext cx="9142920" cy="959040"/>
           </a:xfrm>
           <a:prstGeom prst="rect">
             <a:avLst/>
@@ -17488,7 +17452,7 @@
         <p:spPr>
           <a:xfrm>
             <a:off x="0" y="960120"/>
-            <a:ext cx="9143280" cy="54000"/>
+            <a:ext cx="9142920" cy="53640"/>
           </a:xfrm>
           <a:prstGeom prst="rect">
             <a:avLst/>
@@ -17516,7 +17480,7 @@
         <p:spPr>
           <a:xfrm>
             <a:off x="411480" y="182880"/>
-            <a:ext cx="8228880" cy="593640"/>
+            <a:ext cx="8228520" cy="593280"/>
           </a:xfrm>
           <a:prstGeom prst="rect">
             <a:avLst/>
@@ -17571,7 +17535,7 @@
         <p:spPr>
           <a:xfrm>
             <a:off x="320040" y="1115640"/>
-            <a:ext cx="2742480" cy="3702600"/>
+            <a:ext cx="2742120" cy="3702240"/>
           </a:xfrm>
           <a:prstGeom prst="rect">
             <a:avLst/>
@@ -17606,7 +17570,7 @@
         <p:spPr>
           <a:xfrm>
             <a:off x="320040" y="1115640"/>
-            <a:ext cx="2742480" cy="639360"/>
+            <a:ext cx="2742120" cy="639000"/>
           </a:xfrm>
           <a:prstGeom prst="rect">
             <a:avLst/>
@@ -17638,7 +17602,7 @@
         <p:spPr>
           <a:xfrm>
             <a:off x="429840" y="1207080"/>
-            <a:ext cx="383400" cy="383400"/>
+            <a:ext cx="383040" cy="383040"/>
           </a:xfrm>
           <a:prstGeom prst="rect">
             <a:avLst/>
@@ -17657,7 +17621,7 @@
         <p:spPr>
           <a:xfrm>
             <a:off x="887040" y="1170360"/>
-            <a:ext cx="2102400" cy="291960"/>
+            <a:ext cx="2102040" cy="291600"/>
           </a:xfrm>
           <a:prstGeom prst="rect">
             <a:avLst/>
@@ -17712,7 +17676,7 @@
         <p:spPr>
           <a:xfrm>
             <a:off x="887040" y="1426320"/>
-            <a:ext cx="2102400" cy="255240"/>
+            <a:ext cx="2102040" cy="254880"/>
           </a:xfrm>
           <a:prstGeom prst="rect">
             <a:avLst/>
@@ -17767,7 +17731,7 @@
         <p:spPr>
           <a:xfrm>
             <a:off x="457200" y="1874520"/>
-            <a:ext cx="2468160" cy="255240"/>
+            <a:ext cx="2467800" cy="254880"/>
           </a:xfrm>
           <a:prstGeom prst="rect">
             <a:avLst/>
@@ -17798,7 +17762,7 @@
               </a:tabLst>
             </a:pPr>
             <a:r>
-              <a:rPr b="1" lang="en-US" sz="1000" spc="197" strike="noStrike">
+              <a:rPr b="1" lang="en-US" sz="1000" spc="194" strike="noStrike">
                 <a:solidFill>
                   <a:srgbClr val="0096c7"/>
                 </a:solidFill>
@@ -17826,7 +17790,7 @@
         <p:spPr>
           <a:xfrm>
             <a:off x="484560" y="2176200"/>
-            <a:ext cx="200520" cy="200520"/>
+            <a:ext cx="200160" cy="200160"/>
           </a:xfrm>
           <a:prstGeom prst="rect">
             <a:avLst/>
@@ -17845,7 +17809,7 @@
         <p:spPr>
           <a:xfrm>
             <a:off x="758880" y="2167200"/>
-            <a:ext cx="2193840" cy="255240"/>
+            <a:ext cx="2193480" cy="254880"/>
           </a:xfrm>
           <a:prstGeom prst="rect">
             <a:avLst/>
@@ -17904,7 +17868,7 @@
         <p:spPr>
           <a:xfrm>
             <a:off x="484560" y="2597040"/>
-            <a:ext cx="200520" cy="200520"/>
+            <a:ext cx="200160" cy="200160"/>
           </a:xfrm>
           <a:prstGeom prst="rect">
             <a:avLst/>
@@ -17923,7 +17887,7 @@
         <p:spPr>
           <a:xfrm>
             <a:off x="758880" y="2587680"/>
-            <a:ext cx="2193840" cy="255240"/>
+            <a:ext cx="2193480" cy="254880"/>
           </a:xfrm>
           <a:prstGeom prst="rect">
             <a:avLst/>
@@ -17978,7 +17942,7 @@
         <p:spPr>
           <a:xfrm>
             <a:off x="457200" y="3182040"/>
-            <a:ext cx="2468160" cy="255240"/>
+            <a:ext cx="2467800" cy="254880"/>
           </a:xfrm>
           <a:prstGeom prst="rect">
             <a:avLst/>
@@ -18009,7 +17973,7 @@
               </a:tabLst>
             </a:pPr>
             <a:r>
-              <a:rPr b="1" lang="en-US" sz="1000" spc="197" strike="noStrike">
+              <a:rPr b="1" lang="en-US" sz="1000" spc="194" strike="noStrike">
                 <a:solidFill>
                   <a:srgbClr val="ef476f"/>
                 </a:solidFill>
@@ -18037,7 +18001,7 @@
         <p:spPr>
           <a:xfrm>
             <a:off x="484560" y="3493080"/>
-            <a:ext cx="200520" cy="200520"/>
+            <a:ext cx="200160" cy="200160"/>
           </a:xfrm>
           <a:prstGeom prst="rect">
             <a:avLst/>
@@ -18056,7 +18020,7 @@
         <p:spPr>
           <a:xfrm>
             <a:off x="758880" y="3483720"/>
-            <a:ext cx="2193840" cy="255240"/>
+            <a:ext cx="2193480" cy="254880"/>
           </a:xfrm>
           <a:prstGeom prst="rect">
             <a:avLst/>
@@ -18115,7 +18079,7 @@
         <p:spPr>
           <a:xfrm>
             <a:off x="484560" y="3877200"/>
-            <a:ext cx="200520" cy="200520"/>
+            <a:ext cx="200160" cy="200160"/>
           </a:xfrm>
           <a:prstGeom prst="rect">
             <a:avLst/>
@@ -18134,7 +18098,7 @@
         <p:spPr>
           <a:xfrm>
             <a:off x="758880" y="3867840"/>
-            <a:ext cx="2193840" cy="255240"/>
+            <a:ext cx="2193480" cy="254880"/>
           </a:xfrm>
           <a:prstGeom prst="rect">
             <a:avLst/>
@@ -18189,7 +18153,7 @@
         <p:spPr>
           <a:xfrm>
             <a:off x="3246120" y="1115640"/>
-            <a:ext cx="2742480" cy="3702600"/>
+            <a:ext cx="2742120" cy="3702240"/>
           </a:xfrm>
           <a:prstGeom prst="rect">
             <a:avLst/>
@@ -18224,7 +18188,7 @@
         <p:spPr>
           <a:xfrm>
             <a:off x="3246120" y="1115640"/>
-            <a:ext cx="2742480" cy="639360"/>
+            <a:ext cx="2742120" cy="639000"/>
           </a:xfrm>
           <a:prstGeom prst="rect">
             <a:avLst/>
@@ -18256,7 +18220,7 @@
         <p:spPr>
           <a:xfrm>
             <a:off x="3355920" y="1207080"/>
-            <a:ext cx="383400" cy="383400"/>
+            <a:ext cx="383040" cy="383040"/>
           </a:xfrm>
           <a:prstGeom prst="rect">
             <a:avLst/>
@@ -18275,7 +18239,7 @@
         <p:spPr>
           <a:xfrm>
             <a:off x="3813120" y="1170360"/>
-            <a:ext cx="2102400" cy="291960"/>
+            <a:ext cx="2102040" cy="291600"/>
           </a:xfrm>
           <a:prstGeom prst="rect">
             <a:avLst/>
@@ -18330,7 +18294,7 @@
         <p:spPr>
           <a:xfrm>
             <a:off x="3813120" y="1426320"/>
-            <a:ext cx="2102400" cy="255240"/>
+            <a:ext cx="2102040" cy="254880"/>
           </a:xfrm>
           <a:prstGeom prst="rect">
             <a:avLst/>
@@ -18385,7 +18349,7 @@
         <p:spPr>
           <a:xfrm>
             <a:off x="3383280" y="1874520"/>
-            <a:ext cx="2468160" cy="255240"/>
+            <a:ext cx="2467800" cy="254880"/>
           </a:xfrm>
           <a:prstGeom prst="rect">
             <a:avLst/>
@@ -18416,7 +18380,7 @@
               </a:tabLst>
             </a:pPr>
             <a:r>
-              <a:rPr b="1" lang="en-US" sz="1000" spc="197" strike="noStrike">
+              <a:rPr b="1" lang="en-US" sz="1000" spc="194" strike="noStrike">
                 <a:solidFill>
                   <a:srgbClr val="06d6a0"/>
                 </a:solidFill>
@@ -18444,7 +18408,7 @@
         <p:spPr>
           <a:xfrm>
             <a:off x="3410640" y="2176200"/>
-            <a:ext cx="200520" cy="200520"/>
+            <a:ext cx="200160" cy="200160"/>
           </a:xfrm>
           <a:prstGeom prst="rect">
             <a:avLst/>
@@ -18463,7 +18427,7 @@
         <p:spPr>
           <a:xfrm>
             <a:off x="3684960" y="2167200"/>
-            <a:ext cx="2193840" cy="255240"/>
+            <a:ext cx="2193480" cy="254880"/>
           </a:xfrm>
           <a:prstGeom prst="rect">
             <a:avLst/>
@@ -18522,7 +18486,7 @@
         <p:spPr>
           <a:xfrm>
             <a:off x="3410640" y="2597040"/>
-            <a:ext cx="200520" cy="200520"/>
+            <a:ext cx="200160" cy="200160"/>
           </a:xfrm>
           <a:prstGeom prst="rect">
             <a:avLst/>
@@ -18541,7 +18505,7 @@
         <p:spPr>
           <a:xfrm>
             <a:off x="3684960" y="2587680"/>
-            <a:ext cx="2193840" cy="255240"/>
+            <a:ext cx="2193480" cy="254880"/>
           </a:xfrm>
           <a:prstGeom prst="rect">
             <a:avLst/>
@@ -18600,7 +18564,7 @@
         <p:spPr>
           <a:xfrm>
             <a:off x="3410640" y="3017520"/>
-            <a:ext cx="200520" cy="200520"/>
+            <a:ext cx="200160" cy="200160"/>
           </a:xfrm>
           <a:prstGeom prst="rect">
             <a:avLst/>
@@ -18619,7 +18583,7 @@
         <p:spPr>
           <a:xfrm>
             <a:off x="3684960" y="3008520"/>
-            <a:ext cx="2193840" cy="255240"/>
+            <a:ext cx="2193480" cy="254880"/>
           </a:xfrm>
           <a:prstGeom prst="rect">
             <a:avLst/>
@@ -18674,7 +18638,7 @@
         <p:spPr>
           <a:xfrm>
             <a:off x="3383280" y="3602880"/>
-            <a:ext cx="2468160" cy="255240"/>
+            <a:ext cx="2467800" cy="254880"/>
           </a:xfrm>
           <a:prstGeom prst="rect">
             <a:avLst/>
@@ -18705,7 +18669,7 @@
               </a:tabLst>
             </a:pPr>
             <a:r>
-              <a:rPr b="1" lang="en-US" sz="1000" spc="197" strike="noStrike">
+              <a:rPr b="1" lang="en-US" sz="1000" spc="194" strike="noStrike">
                 <a:solidFill>
                   <a:srgbClr val="ef476f"/>
                 </a:solidFill>
@@ -18733,7 +18697,7 @@
         <p:spPr>
           <a:xfrm>
             <a:off x="3410640" y="3913560"/>
-            <a:ext cx="200520" cy="200520"/>
+            <a:ext cx="200160" cy="200160"/>
           </a:xfrm>
           <a:prstGeom prst="rect">
             <a:avLst/>
@@ -18752,7 +18716,7 @@
         <p:spPr>
           <a:xfrm>
             <a:off x="3684960" y="3904560"/>
-            <a:ext cx="2193840" cy="255240"/>
+            <a:ext cx="2193480" cy="254880"/>
           </a:xfrm>
           <a:prstGeom prst="rect">
             <a:avLst/>
@@ -18807,7 +18771,7 @@
         <p:spPr>
           <a:xfrm>
             <a:off x="6172200" y="1115640"/>
-            <a:ext cx="2742480" cy="3702600"/>
+            <a:ext cx="2742120" cy="3702240"/>
           </a:xfrm>
           <a:prstGeom prst="rect">
             <a:avLst/>
@@ -18842,7 +18806,7 @@
         <p:spPr>
           <a:xfrm>
             <a:off x="6172200" y="1115640"/>
-            <a:ext cx="2742480" cy="639360"/>
+            <a:ext cx="2742120" cy="639000"/>
           </a:xfrm>
           <a:prstGeom prst="rect">
             <a:avLst/>
@@ -18874,7 +18838,7 @@
         <p:spPr>
           <a:xfrm>
             <a:off x="6282000" y="1207080"/>
-            <a:ext cx="383400" cy="383400"/>
+            <a:ext cx="383040" cy="383040"/>
           </a:xfrm>
           <a:prstGeom prst="rect">
             <a:avLst/>
@@ -18893,7 +18857,7 @@
         <p:spPr>
           <a:xfrm>
             <a:off x="6739200" y="1170360"/>
-            <a:ext cx="2102400" cy="291960"/>
+            <a:ext cx="2102040" cy="291600"/>
           </a:xfrm>
           <a:prstGeom prst="rect">
             <a:avLst/>
@@ -18948,7 +18912,7 @@
         <p:spPr>
           <a:xfrm>
             <a:off x="6739200" y="1426320"/>
-            <a:ext cx="2102400" cy="255240"/>
+            <a:ext cx="2102040" cy="254880"/>
           </a:xfrm>
           <a:prstGeom prst="rect">
             <a:avLst/>
@@ -19003,7 +18967,7 @@
         <p:spPr>
           <a:xfrm>
             <a:off x="6309360" y="1874520"/>
-            <a:ext cx="2468160" cy="255240"/>
+            <a:ext cx="2467800" cy="254880"/>
           </a:xfrm>
           <a:prstGeom prst="rect">
             <a:avLst/>
@@ -19034,7 +18998,7 @@
               </a:tabLst>
             </a:pPr>
             <a:r>
-              <a:rPr b="1" lang="en-US" sz="1000" spc="197" strike="noStrike">
+              <a:rPr b="1" lang="en-US" sz="1000" spc="194" strike="noStrike">
                 <a:solidFill>
                   <a:srgbClr val="f4a261"/>
                 </a:solidFill>
@@ -19062,7 +19026,7 @@
         <p:spPr>
           <a:xfrm>
             <a:off x="6336720" y="2176200"/>
-            <a:ext cx="200520" cy="200520"/>
+            <a:ext cx="200160" cy="200160"/>
           </a:xfrm>
           <a:prstGeom prst="rect">
             <a:avLst/>
@@ -19081,7 +19045,7 @@
         <p:spPr>
           <a:xfrm>
             <a:off x="6611040" y="2167200"/>
-            <a:ext cx="2193840" cy="255240"/>
+            <a:ext cx="2193480" cy="254880"/>
           </a:xfrm>
           <a:prstGeom prst="rect">
             <a:avLst/>
@@ -19140,7 +19104,7 @@
         <p:spPr>
           <a:xfrm>
             <a:off x="6336720" y="2597040"/>
-            <a:ext cx="200520" cy="200520"/>
+            <a:ext cx="200160" cy="200160"/>
           </a:xfrm>
           <a:prstGeom prst="rect">
             <a:avLst/>
@@ -19159,7 +19123,7 @@
         <p:spPr>
           <a:xfrm>
             <a:off x="6611040" y="2587680"/>
-            <a:ext cx="2193840" cy="255240"/>
+            <a:ext cx="2193480" cy="254880"/>
           </a:xfrm>
           <a:prstGeom prst="rect">
             <a:avLst/>
@@ -19214,7 +19178,7 @@
         <p:spPr>
           <a:xfrm>
             <a:off x="6309360" y="3182040"/>
-            <a:ext cx="2468160" cy="255240"/>
+            <a:ext cx="2467800" cy="254880"/>
           </a:xfrm>
           <a:prstGeom prst="rect">
             <a:avLst/>
@@ -19245,7 +19209,7 @@
               </a:tabLst>
             </a:pPr>
             <a:r>
-              <a:rPr b="1" lang="en-US" sz="1000" spc="197" strike="noStrike">
+              <a:rPr b="1" lang="en-US" sz="1000" spc="194" strike="noStrike">
                 <a:solidFill>
                   <a:srgbClr val="ef476f"/>
                 </a:solidFill>
@@ -19273,7 +19237,7 @@
         <p:spPr>
           <a:xfrm>
             <a:off x="6336720" y="3493080"/>
-            <a:ext cx="200520" cy="200520"/>
+            <a:ext cx="200160" cy="200160"/>
           </a:xfrm>
           <a:prstGeom prst="rect">
             <a:avLst/>
@@ -19292,7 +19256,7 @@
         <p:spPr>
           <a:xfrm>
             <a:off x="6611040" y="3483720"/>
-            <a:ext cx="2193840" cy="255240"/>
+            <a:ext cx="2193480" cy="254880"/>
           </a:xfrm>
           <a:prstGeom prst="rect">
             <a:avLst/>
@@ -19351,7 +19315,7 @@
         <p:spPr>
           <a:xfrm>
             <a:off x="6336720" y="3877200"/>
-            <a:ext cx="200520" cy="200520"/>
+            <a:ext cx="200160" cy="200160"/>
           </a:xfrm>
           <a:prstGeom prst="rect">
             <a:avLst/>
@@ -19370,7 +19334,7 @@
         <p:spPr>
           <a:xfrm>
             <a:off x="6611040" y="3867840"/>
-            <a:ext cx="2193840" cy="255240"/>
+            <a:ext cx="2193480" cy="254880"/>
           </a:xfrm>
           <a:prstGeom prst="rect">
             <a:avLst/>
@@ -19425,7 +19389,7 @@
         <p:spPr>
           <a:xfrm>
             <a:off x="320040" y="4846320"/>
-            <a:ext cx="8503200" cy="246240"/>
+            <a:ext cx="8502840" cy="245880"/>
           </a:xfrm>
           <a:prstGeom prst="rect">
             <a:avLst/>
@@ -19455,7 +19419,7 @@
         <p:spPr>
           <a:xfrm>
             <a:off x="457200" y="4873680"/>
-            <a:ext cx="8320320" cy="182160"/>
+            <a:ext cx="8319960" cy="181800"/>
           </a:xfrm>
           <a:prstGeom prst="rect">
             <a:avLst/>
@@ -19547,7 +19511,7 @@
         <p:spPr>
           <a:xfrm>
             <a:off x="0" y="0"/>
-            <a:ext cx="9143280" cy="5142960"/>
+            <a:ext cx="9142920" cy="5142600"/>
           </a:xfrm>
           <a:prstGeom prst="rect">
             <a:avLst/>
@@ -19575,7 +19539,7 @@
         <p:spPr>
           <a:xfrm>
             <a:off x="-1371600" y="-1371600"/>
-            <a:ext cx="4571280" cy="4571280"/>
+            <a:ext cx="4570920" cy="4570920"/>
           </a:xfrm>
           <a:prstGeom prst="ellipse">
             <a:avLst/>
@@ -19603,7 +19567,7 @@
         <p:spPr>
           <a:xfrm>
             <a:off x="5943600" y="2286000"/>
-            <a:ext cx="4114080" cy="4114080"/>
+            <a:ext cx="4113720" cy="4113720"/>
           </a:xfrm>
           <a:prstGeom prst="ellipse">
             <a:avLst/>
@@ -19631,7 +19595,7 @@
         <p:spPr>
           <a:xfrm>
             <a:off x="4023360" y="2103120"/>
-            <a:ext cx="1096560" cy="54000"/>
+            <a:ext cx="1096200" cy="53640"/>
           </a:xfrm>
           <a:prstGeom prst="rect">
             <a:avLst/>
@@ -19659,7 +19623,7 @@
         <p:spPr>
           <a:xfrm>
             <a:off x="4023360" y="1554480"/>
-            <a:ext cx="4571280" cy="410760"/>
+            <a:ext cx="4570920" cy="410400"/>
           </a:xfrm>
           <a:prstGeom prst="rect">
             <a:avLst/>
@@ -19690,7 +19654,7 @@
               </a:tabLst>
             </a:pPr>
             <a:r>
-              <a:rPr b="1" lang="en-US" sz="1300" spc="596" strike="noStrike">
+              <a:rPr b="1" lang="en-US" sz="1300" spc="593" strike="noStrike">
                 <a:solidFill>
                   <a:srgbClr val="48cae4"/>
                 </a:solidFill>
@@ -19714,7 +19678,7 @@
         <p:spPr>
           <a:xfrm>
             <a:off x="4023360" y="2194560"/>
-            <a:ext cx="4754160" cy="1096560"/>
+            <a:ext cx="4753800" cy="1096200"/>
           </a:xfrm>
           <a:prstGeom prst="rect">
             <a:avLst/>
@@ -19769,7 +19733,7 @@
         <p:spPr>
           <a:xfrm>
             <a:off x="4023360" y="3383280"/>
-            <a:ext cx="4754160" cy="822240"/>
+            <a:ext cx="4753800" cy="821880"/>
           </a:xfrm>
           <a:prstGeom prst="rect">
             <a:avLst/>
@@ -19828,7 +19792,7 @@
         <p:spPr>
           <a:xfrm>
             <a:off x="1005840" y="1463040"/>
-            <a:ext cx="1462320" cy="1462320"/>
+            <a:ext cx="1461960" cy="1461960"/>
           </a:xfrm>
           <a:prstGeom prst="rect">
             <a:avLst/>
@@ -19884,7 +19848,7 @@
         <p:spPr>
           <a:xfrm>
             <a:off x="0" y="0"/>
-            <a:ext cx="9143280" cy="959400"/>
+            <a:ext cx="9142920" cy="959040"/>
           </a:xfrm>
           <a:prstGeom prst="rect">
             <a:avLst/>
@@ -19912,7 +19876,7 @@
         <p:spPr>
           <a:xfrm>
             <a:off x="0" y="960120"/>
-            <a:ext cx="9143280" cy="54000"/>
+            <a:ext cx="9142920" cy="53640"/>
           </a:xfrm>
           <a:prstGeom prst="rect">
             <a:avLst/>
@@ -19944,7 +19908,7 @@
         <p:spPr>
           <a:xfrm>
             <a:off x="320040" y="182880"/>
-            <a:ext cx="547920" cy="547920"/>
+            <a:ext cx="547560" cy="547560"/>
           </a:xfrm>
           <a:prstGeom prst="rect">
             <a:avLst/>
@@ -19963,7 +19927,7 @@
         <p:spPr>
           <a:xfrm>
             <a:off x="1005840" y="182880"/>
-            <a:ext cx="7771680" cy="593640"/>
+            <a:ext cx="7771320" cy="593280"/>
           </a:xfrm>
           <a:prstGeom prst="rect">
             <a:avLst/>
@@ -20018,7 +19982,7 @@
         <p:spPr>
           <a:xfrm>
             <a:off x="320040" y="1143000"/>
-            <a:ext cx="8503200" cy="913680"/>
+            <a:ext cx="8502840" cy="913320"/>
           </a:xfrm>
           <a:prstGeom prst="rect">
             <a:avLst/>
@@ -20048,7 +20012,7 @@
         <p:spPr>
           <a:xfrm>
             <a:off x="320040" y="1143000"/>
-            <a:ext cx="63360" cy="913680"/>
+            <a:ext cx="63000" cy="913320"/>
           </a:xfrm>
           <a:prstGeom prst="rect">
             <a:avLst/>
@@ -20076,7 +20040,7 @@
         <p:spPr>
           <a:xfrm>
             <a:off x="475560" y="1188720"/>
-            <a:ext cx="3656880" cy="273600"/>
+            <a:ext cx="3656520" cy="273240"/>
           </a:xfrm>
           <a:prstGeom prst="rect">
             <a:avLst/>
@@ -20131,7 +20095,7 @@
         <p:spPr>
           <a:xfrm>
             <a:off x="475560" y="1435680"/>
-            <a:ext cx="8228880" cy="502200"/>
+            <a:ext cx="8228520" cy="501840"/>
           </a:xfrm>
           <a:prstGeom prst="rect">
             <a:avLst/>
@@ -20186,7 +20150,7 @@
         <p:spPr>
           <a:xfrm>
             <a:off x="320040" y="2212920"/>
-            <a:ext cx="3931200" cy="2513880"/>
+            <a:ext cx="3930840" cy="2513520"/>
           </a:xfrm>
           <a:prstGeom prst="rect">
             <a:avLst/>
@@ -20221,7 +20185,7 @@
         <p:spPr>
           <a:xfrm>
             <a:off x="320040" y="2212920"/>
-            <a:ext cx="3931200" cy="365040"/>
+            <a:ext cx="3930840" cy="364680"/>
           </a:xfrm>
           <a:prstGeom prst="rect">
             <a:avLst/>
@@ -20251,7 +20215,7 @@
         <p:spPr>
           <a:xfrm>
             <a:off x="457200" y="2249280"/>
-            <a:ext cx="3656880" cy="273600"/>
+            <a:ext cx="3656520" cy="273240"/>
           </a:xfrm>
           <a:prstGeom prst="rect">
             <a:avLst/>
@@ -20316,7 +20280,7 @@
         <p:spPr>
           <a:xfrm>
             <a:off x="457200" y="2651760"/>
-            <a:ext cx="3656880" cy="1919520"/>
+            <a:ext cx="3656520" cy="1919160"/>
           </a:xfrm>
           <a:prstGeom prst="rect">
             <a:avLst/>
@@ -20511,7 +20475,7 @@
         <p:spPr>
           <a:xfrm>
             <a:off x="4846320" y="2212920"/>
-            <a:ext cx="3976920" cy="2513880"/>
+            <a:ext cx="3976560" cy="2513520"/>
           </a:xfrm>
           <a:prstGeom prst="rect">
             <a:avLst/>
@@ -20546,7 +20510,7 @@
         <p:spPr>
           <a:xfrm>
             <a:off x="4846320" y="2212920"/>
-            <a:ext cx="3976920" cy="365040"/>
+            <a:ext cx="3976560" cy="364680"/>
           </a:xfrm>
           <a:prstGeom prst="rect">
             <a:avLst/>
@@ -20576,7 +20540,7 @@
         <p:spPr>
           <a:xfrm>
             <a:off x="4983480" y="2249280"/>
-            <a:ext cx="3656880" cy="273600"/>
+            <a:ext cx="3656520" cy="273240"/>
           </a:xfrm>
           <a:prstGeom prst="rect">
             <a:avLst/>
@@ -20641,7 +20605,7 @@
         <p:spPr>
           <a:xfrm>
             <a:off x="4983480" y="2651760"/>
-            <a:ext cx="3748320" cy="1919520"/>
+            <a:ext cx="3747960" cy="1919160"/>
           </a:xfrm>
           <a:prstGeom prst="rect">
             <a:avLst/>
@@ -20840,7 +20804,7 @@
         <p:spPr>
           <a:xfrm>
             <a:off x="320040" y="4782240"/>
-            <a:ext cx="8503200" cy="273600"/>
+            <a:ext cx="8502840" cy="273240"/>
           </a:xfrm>
           <a:prstGeom prst="rect">
             <a:avLst/>
@@ -20870,7 +20834,7 @@
         <p:spPr>
           <a:xfrm>
             <a:off x="457200" y="4809600"/>
-            <a:ext cx="8228880" cy="218880"/>
+            <a:ext cx="8228520" cy="218520"/>
           </a:xfrm>
           <a:prstGeom prst="rect">
             <a:avLst/>
